--- a/docs/vogiatzis_condensed_2026-08.pptx
+++ b/docs/vogiatzis_condensed_2026-08.pptx
@@ -13,6 +13,10 @@
     <p:sldId id="261" r:id="rId13"/>
     <p:sldId id="262" r:id="rId14"/>
     <p:sldId id="263" r:id="rId15"/>
+    <p:sldId id="264" r:id="rId16"/>
+    <p:sldId id="265" r:id="rId17"/>
+    <p:sldId id="266" r:id="rId18"/>
+    <p:sldId id="267" r:id="rId19"/>
   </p:sldIdLst>
   <p:sldSz cx="12191695" cy="6858000" type="screen4x3"/>
   <p:notesSz cx="6858000" cy="9144000"/>
@@ -509,7 +513,217 @@
           <a:lstStyle/>
           <a:p>
             <a:r>
-              <a:t>Three parts: the modelling result Kostas asked about, the chemistry finding that explains its ceiling, and where the remaining signal is. All numbers are leave-extractants-out, out-of-fold.</a:t>
+              <a:t>First full walkthrough for Kostas. Order: problem, data, how models are tested, what the 3D model is, results, why the 3D signal is capped, the chemistry benchmark, what actually moves the score, next steps.</a:t>
+            </a:r>
+          </a:p>
+        </p:txBody>
+      </p:sp>
+      <p:sp>
+        <p:nvSpPr>
+          <p:cNvPr id="4" name="Slide Number Placeholder 3"/>
+          <p:cNvSpPr>
+            <a:spLocks noGrp="1"/>
+          </p:cNvSpPr>
+          <p:nvPr>
+            <p:ph type="sldNum" idx="5" sz="quarter"/>
+          </p:nvPr>
+        </p:nvSpPr>
+        <p:spPr/>
+      </p:sp>
+    </p:spTree>
+  </p:cSld>
+  <p:clrMapOvr>
+    <a:masterClrMapping/>
+  </p:clrMapOvr>
+</p:notes>
+</file>
+
+<file path=ppt/notesSlides/notesSlide10.xml><?xml version="1.0" encoding="utf-8"?>
+<p:notes xmlns:a="http://schemas.openxmlformats.org/drawingml/2006/main" xmlns:p="http://schemas.openxmlformats.org/presentationml/2006/main" xmlns:r="http://schemas.openxmlformats.org/officeDocument/2006/relationships">
+  <p:cSld>
+    <p:spTree>
+      <p:nvGrpSpPr>
+        <p:cNvPr id="1" name=""/>
+        <p:cNvGrpSpPr/>
+        <p:nvPr/>
+      </p:nvGrpSpPr>
+      <p:grpSpPr>
+        <a:xfrm>
+          <a:off x="0" y="0"/>
+          <a:ext cx="0" cy="0"/>
+          <a:chOff x="0" y="0"/>
+          <a:chExt cx="0" cy="0"/>
+        </a:xfrm>
+      </p:grpSpPr>
+      <p:sp>
+        <p:nvSpPr>
+          <p:cNvPr id="2" name="Slide Image Placeholder 1"/>
+          <p:cNvSpPr>
+            <a:spLocks noGrp="1"/>
+          </p:cNvSpPr>
+          <p:nvPr>
+            <p:ph type="sldImg" idx="2"/>
+          </p:nvPr>
+        </p:nvSpPr>
+        <p:spPr/>
+      </p:sp>
+      <p:sp>
+        <p:nvSpPr>
+          <p:cNvPr id="3" name="Notes Placeholder 2"/>
+          <p:cNvSpPr>
+            <a:spLocks noGrp="1"/>
+          </p:cNvSpPr>
+          <p:nvPr>
+            <p:ph type="body" idx="3" sz="quarter"/>
+          </p:nvPr>
+        </p:nvSpPr>
+        <p:spPr/>
+        <p:txBody>
+          <a:bodyPr/>
+          <a:lstStyle/>
+          <a:p>
+            <a:r>
+              <a:t>Population version of the previous slide: one dot per ligand. GFN2 mean 0.41 — the bond shrinks 2.5x too little — and scatter is mostly noise (only 23% of its ligand-to-ligand variation reproduces; 96% for g-xTB). g-xTB (Grimme group 2025, f-electrons explicit) improves 71 of 71 ligands, p = 5e-52; replicated in solvent. Why this is new: published benchmarks asked 'are the bond lengths of individual complexes close to DFT or X-ray?' (Bursch 2017: 80 complexes vs X-ray; Zhang 2026: vs DFT). Nobody asked 'walking La-&gt;Lu inside one ligand, does the bond shrink by the RIGHT AMOUNT vs experiment?' — a systematic trend error that per-complex statistics cannot see. And g-xTB's own preprint validates energies only, so its lanthanide geometries were untested until now. Obligation: read the Ln-xTB paper in full and run it through this same benchmark.</a:t>
+            </a:r>
+          </a:p>
+        </p:txBody>
+      </p:sp>
+      <p:sp>
+        <p:nvSpPr>
+          <p:cNvPr id="4" name="Slide Number Placeholder 3"/>
+          <p:cNvSpPr>
+            <a:spLocks noGrp="1"/>
+          </p:cNvSpPr>
+          <p:nvPr>
+            <p:ph type="sldNum" idx="5" sz="quarter"/>
+          </p:nvPr>
+        </p:nvSpPr>
+        <p:spPr/>
+      </p:sp>
+    </p:spTree>
+  </p:cSld>
+  <p:clrMapOvr>
+    <a:masterClrMapping/>
+  </p:clrMapOvr>
+</p:notes>
+</file>
+
+<file path=ppt/notesSlides/notesSlide11.xml><?xml version="1.0" encoding="utf-8"?>
+<p:notes xmlns:a="http://schemas.openxmlformats.org/drawingml/2006/main" xmlns:p="http://schemas.openxmlformats.org/presentationml/2006/main" xmlns:r="http://schemas.openxmlformats.org/officeDocument/2006/relationships">
+  <p:cSld>
+    <p:spTree>
+      <p:nvGrpSpPr>
+        <p:cNvPr id="1" name=""/>
+        <p:cNvGrpSpPr/>
+        <p:nvPr/>
+      </p:nvGrpSpPr>
+      <p:grpSpPr>
+        <a:xfrm>
+          <a:off x="0" y="0"/>
+          <a:ext cx="0" cy="0"/>
+          <a:chOff x="0" y="0"/>
+          <a:chExt cx="0" cy="0"/>
+        </a:xfrm>
+      </p:grpSpPr>
+      <p:sp>
+        <p:nvSpPr>
+          <p:cNvPr id="2" name="Slide Image Placeholder 1"/>
+          <p:cNvSpPr>
+            <a:spLocks noGrp="1"/>
+          </p:cNvSpPr>
+          <p:nvPr>
+            <p:ph type="sldImg" idx="2"/>
+          </p:nvPr>
+        </p:nvSpPr>
+        <p:spPr/>
+      </p:sp>
+      <p:sp>
+        <p:nvSpPr>
+          <p:cNvPr id="3" name="Notes Placeholder 2"/>
+          <p:cNvSpPr>
+            <a:spLocks noGrp="1"/>
+          </p:cNvSpPr>
+          <p:nvPr>
+            <p:ph type="body" idx="3" sz="quarter"/>
+          </p:nvPr>
+        </p:nvSpPr>
+        <p:spPr/>
+        <p:txBody>
+          <a:bodyPr/>
+          <a:lstStyle/>
+          <a:p>
+            <a:r>
+              <a:t>The decisive experiment: re-optimise all 956 complexes with g-xTB (structures now carry correct contraction physics), retrain everything matched — score does not move (+0.004). Cleaning conformer noise 455x: slightly worse. So structure quality is not the bottleneck. What did pay, every time: aligning the training loss with the scored quantity — the quantile loss on the trees (+0.136 cumulative) and up-weighting the within-block contrast term for the 3D model (+0.014-0.015, replicated on two different architectures with disjoint random seeds). Ceiling: repeated measurements of the same separation agree to 0.153 on a spread of 0.224 -&gt; labels support R2 ~ 0.53; we are at 0.31. The rest is likely in conditions and in predicting pairs directly — not in geometry (~1% of pair variance).</a:t>
+            </a:r>
+          </a:p>
+        </p:txBody>
+      </p:sp>
+      <p:sp>
+        <p:nvSpPr>
+          <p:cNvPr id="4" name="Slide Number Placeholder 3"/>
+          <p:cNvSpPr>
+            <a:spLocks noGrp="1"/>
+          </p:cNvSpPr>
+          <p:nvPr>
+            <p:ph type="sldNum" idx="5" sz="quarter"/>
+          </p:nvPr>
+        </p:nvSpPr>
+        <p:spPr/>
+      </p:sp>
+    </p:spTree>
+  </p:cSld>
+  <p:clrMapOvr>
+    <a:masterClrMapping/>
+  </p:clrMapOvr>
+</p:notes>
+</file>
+
+<file path=ppt/notesSlides/notesSlide12.xml><?xml version="1.0" encoding="utf-8"?>
+<p:notes xmlns:a="http://schemas.openxmlformats.org/drawingml/2006/main" xmlns:p="http://schemas.openxmlformats.org/presentationml/2006/main" xmlns:r="http://schemas.openxmlformats.org/officeDocument/2006/relationships">
+  <p:cSld>
+    <p:spTree>
+      <p:nvGrpSpPr>
+        <p:cNvPr id="1" name=""/>
+        <p:cNvGrpSpPr/>
+        <p:nvPr/>
+      </p:nvGrpSpPr>
+      <p:grpSpPr>
+        <a:xfrm>
+          <a:off x="0" y="0"/>
+          <a:ext cx="0" cy="0"/>
+          <a:chOff x="0" y="0"/>
+          <a:chExt cx="0" cy="0"/>
+        </a:xfrm>
+      </p:grpSpPr>
+      <p:sp>
+        <p:nvSpPr>
+          <p:cNvPr id="2" name="Slide Image Placeholder 1"/>
+          <p:cNvSpPr>
+            <a:spLocks noGrp="1"/>
+          </p:cNvSpPr>
+          <p:nvPr>
+            <p:ph type="sldImg" idx="2"/>
+          </p:nvPr>
+        </p:nvSpPr>
+        <p:spPr/>
+      </p:sp>
+      <p:sp>
+        <p:nvSpPr>
+          <p:cNvPr id="3" name="Notes Placeholder 2"/>
+          <p:cNvSpPr>
+            <a:spLocks noGrp="1"/>
+          </p:cNvSpPr>
+          <p:nvPr>
+            <p:ph type="body" idx="3" sz="quarter"/>
+          </p:nvPr>
+        </p:nvSpPr>
+        <p:spPr/>
+        <p:txBody>
+          <a:bodyPr/>
+          <a:lstStyle/>
+          <a:p>
+            <a:r>
+              <a:t>Suggested call order: S2 (2 min), S7 (5), S8-S10 (10), S11 (3), discussion. If he asks for the one-sentence version: the 3D model earns its place by correcting shared errors, the chemistry that limits it is now measured and publishable on its own, and the cheapest reliable gains were loss-function alignment.</a:t>
             </a:r>
           </a:p>
         </p:txBody>
@@ -579,7 +793,7 @@
           <a:lstStyle/>
           <a:p>
             <a:r>
-              <a:t>SAFE is literature-curated; every row keeps its DOI and full conditions, so replicates across labs are real replicates (that later gives the noise floor). Modelled subset = trivalent lanthanides with buildable complexes; Pm absent in nature. Blocking: one extractant x one binned condition set; adjacent pairs are differenced inside blocks only. 956 complexes; convergence verified by an independent force check, not xtb's own flag.</a:t>
+              <a:t>Industrial framing: solvent extraction is the route; adjacent pairs (Nd/Pr for magnets, Dy/Tb) are the expensive ones. The schematic defines the exact predicted quantity — walk it slowly. R2 = 0 means predicting the average separation for every pair; even the sign of the separation is nontrivial (best models reach 67% sign accuracy).</a:t>
             </a:r>
           </a:p>
         </p:txBody>
@@ -649,7 +863,7 @@
           <a:lstStyle/>
           <a:p>
             <a:r>
-              <a:t>Metric intuition: R2=0 already means predicting the average separation for every pair; adjacent radii differ by 0.013 A. PCA: winsorised at 4 sigma, PC1/2 = 19/8 percent. Left panel: metal colouring invisible = lanthanide identity is a vanishing direction. Right: extractant families are tight clusters (TODGA alone 1,553 rows). Generalisation must cross clusters while resolving a signal orthogonal to them. Per-seed sd of a paired delta is 0.0285 -&gt; confirmatory claims use 24-32 seeds.</a:t>
+              <a:t>SAFE is DOI-linked and condition-resolved; replicates across labs are real replicates (later this gives the noise floor). Pm does not occur in nature -&gt; 14 lanthanides. Architector builds a 3D guess of the actual extraction complex; GFN2-xTB relaxes it; convergence is verified with an independent force check. 956 unique complexes back 4,746 measurements.</a:t>
             </a:r>
           </a:p>
         </p:txBody>
@@ -719,7 +933,7 @@
           <a:lstStyle/>
           <a:p>
             <a:r>
-              <a:t>His email numbers were the July column. Both gains are objective changes, no architecture changed: boosting RMSE-&gt;Quantile(0.6) + re-tuned depth/rsm (+0.016 of it confirmed on a held-out third); encoder contrast weight 2-&gt;4 (+0.014, replicates on both encoders). Control row: adding the 84 3D-derived tabular columns to the same CatBoost collapses it (-0.02); the stack then cuts that arm to weight 0.03 and the encoder marginal is +0.041. So the comparison is against the strongest tabular configuration, and cheap 3D descriptors do not replicate the encoder. Caveats to say aloud: contribution shrank from +0.038 as partners improved (complementarity mechanism); strict key halves it to +0.010 (published was already indistinguishable there); exploratory -- no clean held-out partition remains, fresh split is the next step.</a:t>
+              <a:t>Why grouped: extractants repeat across rows; a random row split would let the model memorise the ligand — leakage. Why repeats: one grouping is one lottery draw. Why ensembles/seeds: single networks are noisy; per-seed sd of a paired difference is 0.0285, so confirmatory comparisons use 24-32 seeds. Out-of-fold = the union of held-out predictions.</a:t>
             </a:r>
           </a:p>
         </p:txBody>
@@ -789,7 +1003,7 @@
           <a:lstStyle/>
           <a:p>
             <a:r>
-              <a:t>Parameter file: every Ln parameter Ce-&gt;Lu is linear interpolation between two anchors, residual 5e-7 = printed precision; f-in-core is the authors' documented design. Consequence is ours: one scalar of metal information, linear in Z -- no f-shell, no gadolinium break. Empirical confirmation: 8 encoders, effective rank 1.05; two architectures correlate 0.986, same as two seeds of one. And the scalar is already the Shannon radius column.</a:t>
+              <a:t>Two conventional ('2D': they see the molecular graph and conditions, no 3D structure): gradient-boosted trees on the 746 columns; a neural network on fingerprints. The third is ours and is introduced properly on the next slide. All three predict log D per row; separations come from differencing predictions within a block. A combination fits per-extractant weights over the three predictions, on the separation vectors themselves (nested, held-out).</a:t>
             </a:r>
           </a:p>
         </p:txBody>
@@ -859,7 +1073,7 @@
           <a:lstStyle/>
           <a:p>
             <a:r>
-              <a:t>Construction: one relaxed anchor per ligand family, substitute all 15 Ln, re-relax -- series in correspondence, slope clean of conformer noise. c_L = d&lt;M-donor&gt;/d r_Shannon, experiment = 1.00. GFN2 0.41 = 2.5x under; also mostly noise (23% cross-ligand reproducibility vs 96% for g-xTB). g-xTB improves 71/71 ligands, paired p = 5e-52; replicated in solvent. Novelty (checked against literature): Bursch 2017 and Ln-xTB 2026 report per-complex bond ERRORS vs DFT/X-ray; the contraction SLOPE vs experiment had not been measured, and g-xTB had no lanthanide geometry validation at all. Obligation: read Ln-xTB full text before submission; running the benchmark on Ln-xTB is the natural follow-up and our falsifying test. Punchline for next slide: this fixes the chemistry and the ML score does not move.</a:t>
+              <a:t>Vietoris-Rips = the mesh built by rule 2+3; message passing = each atom repeatedly updates its state from its neighbours along edges and triangles; after 3 rounds each atom has 'seen' its 3-hop environment. Pooling is metal-centred: a soft histogram of distances to the metal — plain averaging over ~100 atoms would wash out the 0.01-A shell changes that carry the signal. Without that pooling the model cannot even tell which lanthanide it holds.</a:t>
             </a:r>
           </a:p>
         </p:txBody>
@@ -929,7 +1143,7 @@
           <a:lstStyle/>
           <a:p>
             <a:r>
-              <a:t>Left: four representation-side interventions, all null or harmful, all powered -- including re-optimising all 956 complexes with g-xTB. One apparent geometry positive (+0.033, p=0.02, 7/8 seeds) was calibration: one rescaling constant on the OLD geometry recovered 237% of it. Right: the objective changes that survived, including the same contrast-weight change transferring across architectures on disjoint seeds. Ceiling: naive noise math gives an impossible negative ceiling; condition effects cancel on differencing (separations reproduce to 0.153 on a 0.224 spread) -&gt; ~0.53, a lower bound. We are at ~60%. Remaining signal: conditions and direct pair modelling, not geometry (~1% of pair variance).</a:t>
+              <a:t>Loss functions mattered more than architectures: the tree model at RMSE scores 0.14; switching to a quantile loss and re-tuning gives 0.278. The 3D model's contrast-weighted loss gives 0.266. Control row: giving the tree model 84 3D-derived tabular descriptors (donor distances, angles, charges) makes it WORSE (-0.02) — so the 3D model's contribution is not replicable by cheap descriptors; in the combination the fitted weight on the 3D model is the largest (0.46). Caveats aloud: under stricter condition blocking the 3D margin halves to +0.010; the 0.313 is exploratory — all clean held-out partitions have been consumed; a fresh split is the next step before any publication-grade claim.</a:t>
             </a:r>
           </a:p>
         </p:txBody>
@@ -999,7 +1213,77 @@
           <a:lstStyle/>
           <a:p>
             <a:r>
-              <a:t>Suggested call order: S4 (5 min), S6 (10), S7 (5), then discussion. If very short: S4 and S6 are the talk. On the fresh split: all three prior partitions have been consumed by selection; this is the one thing needed before any publication-grade ML claim. On the paper: the benchmark stands alone, does not depend on any ML outcome.</a:t>
+              <a:t>Walk the figure: these are the method's own published parameters, plotted against atomic number. Every lanthanide between Ce and Lu was never fitted — it is the straight line. f-electrons are frozen into the core. So to this method, 'which lanthanide' is a single number that slides along a line. Consequence for ML: any structure it produces can encode the metal only through that one number — and we already give the models that number as a column (the experimental ionic radius). Empirical check: we trained eight different 3D architectures; their predictions are statistically identical (correlation 0.986 across architectures = the seed-to-seed correlation of one architecture).</a:t>
+            </a:r>
+          </a:p>
+        </p:txBody>
+      </p:sp>
+      <p:sp>
+        <p:nvSpPr>
+          <p:cNvPr id="4" name="Slide Number Placeholder 3"/>
+          <p:cNvSpPr>
+            <a:spLocks noGrp="1"/>
+          </p:cNvSpPr>
+          <p:nvPr>
+            <p:ph type="sldNum" idx="5" sz="quarter"/>
+          </p:nvPr>
+        </p:nvSpPr>
+        <p:spPr/>
+      </p:sp>
+    </p:spTree>
+  </p:cSld>
+  <p:clrMapOvr>
+    <a:masterClrMapping/>
+  </p:clrMapOvr>
+</p:notes>
+</file>
+
+<file path=ppt/notesSlides/notesSlide9.xml><?xml version="1.0" encoding="utf-8"?>
+<p:notes xmlns:a="http://schemas.openxmlformats.org/drawingml/2006/main" xmlns:p="http://schemas.openxmlformats.org/presentationml/2006/main" xmlns:r="http://schemas.openxmlformats.org/officeDocument/2006/relationships">
+  <p:cSld>
+    <p:spTree>
+      <p:nvGrpSpPr>
+        <p:cNvPr id="1" name=""/>
+        <p:cNvGrpSpPr/>
+        <p:nvPr/>
+      </p:nvGrpSpPr>
+      <p:grpSpPr>
+        <a:xfrm>
+          <a:off x="0" y="0"/>
+          <a:ext cx="0" cy="0"/>
+          <a:chOff x="0" y="0"/>
+          <a:chExt cx="0" cy="0"/>
+        </a:xfrm>
+      </p:grpSpPr>
+      <p:sp>
+        <p:nvSpPr>
+          <p:cNvPr id="2" name="Slide Image Placeholder 1"/>
+          <p:cNvSpPr>
+            <a:spLocks noGrp="1"/>
+          </p:cNvSpPr>
+          <p:nvPr>
+            <p:ph type="sldImg" idx="2"/>
+          </p:nvPr>
+        </p:nvSpPr>
+        <p:spPr/>
+      </p:sp>
+      <p:sp>
+        <p:nvSpPr>
+          <p:cNvPr id="3" name="Notes Placeholder 2"/>
+          <p:cNvSpPr>
+            <a:spLocks noGrp="1"/>
+          </p:cNvSpPr>
+          <p:nvPr>
+            <p:ph type="body" idx="3" sz="quarter"/>
+          </p:nvPr>
+        </p:nvSpPr>
+        <p:spPr/>
+        <p:txBody>
+          <a:bodyPr/>
+          <a:lstStyle/>
+          <a:p>
+            <a:r>
+              <a:t>Define the observable slowly — it is ours. Take ONE ligand cage, keep it fixed, put each of the 14 lanthanides in, re-relax, measure the mean metal-donor distance, plot against the EXPERIMENTAL radius of that ion. Slope 1.00 = the bond tracks reality. This isolates exactly the physics adjacent-pair selectivity depends on. The figure is one real ligand of the 71 measured; both methods run through the identical protocol, same binary.</a:t>
             </a:r>
           </a:p>
         </p:txBody>
@@ -4035,7 +4319,7 @@
               </a:defRPr>
             </a:pPr>
             <a:r>
-              <a:t>Adjacent-lanthanide selectivity from 3D structure</a:t>
+              <a:t>Predicting adjacent-lanthanide selectivity from 3D structure</a:t>
             </a:r>
           </a:p>
           <a:p>
@@ -4047,7 +4331,7 @@
               </a:defRPr>
             </a:pPr>
             <a:r>
-              <a:t>Data, models, and what limits them</a:t>
+              <a:t>What the data supports, and what limits it</a:t>
             </a:r>
           </a:p>
           <a:p>
@@ -4069,6 +4353,667 @@
             </a:pPr>
             <a:r>
               <a:t>Bogdan Mironov · August 2026</a:t>
+            </a:r>
+          </a:p>
+        </p:txBody>
+      </p:sp>
+    </p:spTree>
+  </p:cSld>
+  <p:clrMapOvr>
+    <a:masterClrMapping/>
+  </p:clrMapOvr>
+</p:sld>
+</file>
+
+<file path=ppt/slides/slide10.xml><?xml version="1.0" encoding="utf-8"?>
+<p:sld xmlns:a="http://schemas.openxmlformats.org/drawingml/2006/main" xmlns:p="http://schemas.openxmlformats.org/presentationml/2006/main" xmlns:r="http://schemas.openxmlformats.org/officeDocument/2006/relationships">
+  <p:cSld>
+    <p:spTree>
+      <p:nvGrpSpPr>
+        <p:cNvPr id="1" name=""/>
+        <p:cNvGrpSpPr/>
+        <p:nvPr/>
+      </p:nvGrpSpPr>
+      <p:grpSpPr/>
+      <p:sp>
+        <p:nvSpPr>
+          <p:cNvPr id="2" name="TextBox 1"/>
+          <p:cNvSpPr txBox="1"/>
+          <p:nvPr/>
+        </p:nvSpPr>
+        <p:spPr>
+          <a:xfrm>
+            <a:off x="502920" y="292608"/>
+            <a:ext cx="11247120" cy="640080"/>
+          </a:xfrm>
+          <a:prstGeom prst="rect">
+            <a:avLst/>
+          </a:prstGeom>
+          <a:noFill/>
+        </p:spPr>
+        <p:txBody>
+          <a:bodyPr wrap="none">
+            <a:spAutoFit/>
+          </a:bodyPr>
+          <a:lstStyle/>
+          <a:p>
+            <a:pPr>
+              <a:defRPr sz="2600" b="1">
+                <a:solidFill>
+                  <a:srgbClr val="1A2E4A"/>
+                </a:solidFill>
+              </a:defRPr>
+            </a:pPr>
+            <a:r>
+              <a:t>Across 71 ligands: GFN2-xTB under-responds 2.5×; g-xTB gets it right</a:t>
+            </a:r>
+          </a:p>
+        </p:txBody>
+      </p:sp>
+      <p:pic>
+        <p:nvPicPr>
+          <p:cNvPr id="3" name="Picture 2" descr="f5_contraction.png"/>
+          <p:cNvPicPr>
+            <a:picLocks noChangeAspect="1"/>
+          </p:cNvPicPr>
+          <p:nvPr/>
+        </p:nvPicPr>
+        <p:blipFill>
+          <a:blip r:embed="rId3"/>
+          <a:stretch>
+            <a:fillRect/>
+          </a:stretch>
+        </p:blipFill>
+        <p:spPr>
+          <a:xfrm>
+            <a:off x="2255367" y="1280160"/>
+            <a:ext cx="7680960" cy="3561641"/>
+          </a:xfrm>
+          <a:prstGeom prst="rect">
+            <a:avLst/>
+          </a:prstGeom>
+        </p:spPr>
+      </p:pic>
+      <p:sp>
+        <p:nvSpPr>
+          <p:cNvPr id="4" name="TextBox 3"/>
+          <p:cNvSpPr txBox="1"/>
+          <p:nvPr/>
+        </p:nvSpPr>
+        <p:spPr>
+          <a:xfrm>
+            <a:off x="548640" y="4892040"/>
+            <a:ext cx="11064240" cy="1783080"/>
+          </a:xfrm>
+          <a:prstGeom prst="rect">
+            <a:avLst/>
+          </a:prstGeom>
+          <a:noFill/>
+        </p:spPr>
+        <p:txBody>
+          <a:bodyPr wrap="square">
+            <a:spAutoFit/>
+          </a:bodyPr>
+          <a:lstStyle/>
+          <a:p>
+            <a:pPr>
+              <a:spcAft>
+                <a:spcPts val="700"/>
+              </a:spcAft>
+              <a:defRPr sz="1350">
+                <a:solidFill>
+                  <a:srgbClr val="101214"/>
+                </a:solidFill>
+              </a:defRPr>
+            </a:pPr>
+            <a:r>
+              <a:t>New in this measurement: published benchmarks score individual complexes against DFT or X-ray structures. The response to the contraction — the trend across the series, against experimental radii — had not been measured for any tight-binding method, and g-xTB's lanthanide geometries had never been tested at all (its paper validates energies).</a:t>
+            </a:r>
+          </a:p>
+        </p:txBody>
+      </p:sp>
+    </p:spTree>
+  </p:cSld>
+  <p:clrMapOvr>
+    <a:masterClrMapping/>
+  </p:clrMapOvr>
+</p:sld>
+</file>
+
+<file path=ppt/slides/slide11.xml><?xml version="1.0" encoding="utf-8"?>
+<p:sld xmlns:a="http://schemas.openxmlformats.org/drawingml/2006/main" xmlns:p="http://schemas.openxmlformats.org/presentationml/2006/main" xmlns:r="http://schemas.openxmlformats.org/officeDocument/2006/relationships">
+  <p:cSld>
+    <p:spTree>
+      <p:nvGrpSpPr>
+        <p:cNvPr id="1" name=""/>
+        <p:cNvGrpSpPr/>
+        <p:nvPr/>
+      </p:nvGrpSpPr>
+      <p:grpSpPr/>
+      <p:sp>
+        <p:nvSpPr>
+          <p:cNvPr id="2" name="TextBox 1"/>
+          <p:cNvSpPr txBox="1"/>
+          <p:nvPr/>
+        </p:nvSpPr>
+        <p:spPr>
+          <a:xfrm>
+            <a:off x="502920" y="292608"/>
+            <a:ext cx="11247120" cy="640080"/>
+          </a:xfrm>
+          <a:prstGeom prst="rect">
+            <a:avLst/>
+          </a:prstGeom>
+          <a:noFill/>
+        </p:spPr>
+        <p:txBody>
+          <a:bodyPr wrap="none">
+            <a:spAutoFit/>
+          </a:bodyPr>
+          <a:lstStyle/>
+          <a:p>
+            <a:pPr>
+              <a:defRPr sz="2600" b="1">
+                <a:solidFill>
+                  <a:srgbClr val="1A2E4A"/>
+                </a:solidFill>
+              </a:defRPr>
+            </a:pPr>
+            <a:r>
+              <a:t>Fixing the structures does not fix the prediction — the loss function does</a:t>
+            </a:r>
+          </a:p>
+        </p:txBody>
+      </p:sp>
+      <p:graphicFrame>
+        <p:nvGraphicFramePr>
+          <p:cNvPr id="3" name="Table 2"/>
+          <p:cNvGraphicFramePr>
+            <a:graphicFrameLocks noGrp="1"/>
+          </p:cNvGraphicFramePr>
+          <p:nvPr/>
+        </p:nvGraphicFramePr>
+        <p:xfrm>
+          <a:off x="640080" y="1371600"/>
+          <a:ext cx="10881360" cy="1335024"/>
+        </p:xfrm>
+        <a:graphic>
+          <a:graphicData uri="http://schemas.openxmlformats.org/drawingml/2006/table">
+            <a:tbl>
+              <a:tblPr firstRow="1" bandRow="1">
+                <a:tableStyleId>{5C22544A-7EE6-4342-B048-85BDC9FD1C3A}</a:tableStyleId>
+              </a:tblPr>
+              <a:tblGrid>
+                <a:gridCol w="4297680"/>
+                <a:gridCol w="1371600"/>
+                <a:gridCol w="3840480"/>
+                <a:gridCol w="1371600"/>
+              </a:tblGrid>
+              <a:tr h="333756">
+                <a:tc>
+                  <a:txBody>
+                    <a:bodyPr/>
+                    <a:lstStyle/>
+                    <a:p>
+                      <a:pPr>
+                        <a:defRPr sz="1300" b="1">
+                          <a:solidFill>
+                            <a:srgbClr val="FFFFFF"/>
+                          </a:solidFill>
+                        </a:defRPr>
+                      </a:pPr>
+                      <a:r>
+                        <a:t>changing the structures</a:t>
+                      </a:r>
+                    </a:p>
+                  </a:txBody>
+                  <a:tcPr/>
+                </a:tc>
+                <a:tc>
+                  <a:txBody>
+                    <a:bodyPr/>
+                    <a:lstStyle/>
+                    <a:p>
+                      <a:pPr>
+                        <a:defRPr sz="1300" b="1">
+                          <a:solidFill>
+                            <a:srgbClr val="FFFFFF"/>
+                          </a:solidFill>
+                        </a:defRPr>
+                      </a:pPr>
+                      <a:r>
+                        <a:t>Δ score</a:t>
+                      </a:r>
+                    </a:p>
+                  </a:txBody>
+                  <a:tcPr/>
+                </a:tc>
+                <a:tc>
+                  <a:txBody>
+                    <a:bodyPr/>
+                    <a:lstStyle/>
+                    <a:p>
+                      <a:pPr>
+                        <a:defRPr sz="1300" b="1">
+                          <a:solidFill>
+                            <a:srgbClr val="FFFFFF"/>
+                          </a:solidFill>
+                        </a:defRPr>
+                      </a:pPr>
+                      <a:r>
+                        <a:t>changing the objective</a:t>
+                      </a:r>
+                    </a:p>
+                  </a:txBody>
+                  <a:tcPr/>
+                </a:tc>
+                <a:tc>
+                  <a:txBody>
+                    <a:bodyPr/>
+                    <a:lstStyle/>
+                    <a:p>
+                      <a:pPr>
+                        <a:defRPr sz="1300" b="1">
+                          <a:solidFill>
+                            <a:srgbClr val="FFFFFF"/>
+                          </a:solidFill>
+                        </a:defRPr>
+                      </a:pPr>
+                      <a:r>
+                        <a:t>Δ score</a:t>
+                      </a:r>
+                    </a:p>
+                  </a:txBody>
+                  <a:tcPr/>
+                </a:tc>
+              </a:tr>
+              <a:tr h="333756">
+                <a:tc>
+                  <a:txBody>
+                    <a:bodyPr/>
+                    <a:lstStyle/>
+                    <a:p>
+                      <a:pPr>
+                        <a:defRPr sz="1300"/>
+                      </a:pPr>
+                      <a:r>
+                        <a:t>g-xTB geometries (correct contraction physics)</a:t>
+                      </a:r>
+                    </a:p>
+                  </a:txBody>
+                  <a:tcPr/>
+                </a:tc>
+                <a:tc>
+                  <a:txBody>
+                    <a:bodyPr/>
+                    <a:lstStyle/>
+                    <a:p>
+                      <a:pPr>
+                        <a:defRPr sz="1300"/>
+                      </a:pPr>
+                      <a:r>
+                        <a:t>+0.004 (n.s.)</a:t>
+                      </a:r>
+                    </a:p>
+                  </a:txBody>
+                  <a:tcPr/>
+                </a:tc>
+                <a:tc>
+                  <a:txBody>
+                    <a:bodyPr/>
+                    <a:lstStyle/>
+                    <a:p>
+                      <a:pPr>
+                        <a:defRPr sz="1300"/>
+                      </a:pPr>
+                      <a:r>
+                        <a:t>trees: RMSE → quantile loss + re-tune</a:t>
+                      </a:r>
+                    </a:p>
+                  </a:txBody>
+                  <a:tcPr/>
+                </a:tc>
+                <a:tc>
+                  <a:txBody>
+                    <a:bodyPr/>
+                    <a:lstStyle/>
+                    <a:p>
+                      <a:pPr>
+                        <a:defRPr sz="1300"/>
+                      </a:pPr>
+                      <a:r>
+                        <a:t>+0.136</a:t>
+                      </a:r>
+                    </a:p>
+                  </a:txBody>
+                  <a:tcPr/>
+                </a:tc>
+              </a:tr>
+              <a:tr h="333756">
+                <a:tc>
+                  <a:txBody>
+                    <a:bodyPr/>
+                    <a:lstStyle/>
+                    <a:p>
+                      <a:pPr>
+                        <a:defRPr sz="1300"/>
+                      </a:pPr>
+                      <a:r>
+                        <a:t>conformer noise removed (455× cleaner series)</a:t>
+                      </a:r>
+                    </a:p>
+                  </a:txBody>
+                  <a:tcPr/>
+                </a:tc>
+                <a:tc>
+                  <a:txBody>
+                    <a:bodyPr/>
+                    <a:lstStyle/>
+                    <a:p>
+                      <a:pPr>
+                        <a:defRPr sz="1300"/>
+                      </a:pPr>
+                      <a:r>
+                        <a:t>−0.013</a:t>
+                      </a:r>
+                    </a:p>
+                  </a:txBody>
+                  <a:tcPr/>
+                </a:tc>
+                <a:tc>
+                  <a:txBody>
+                    <a:bodyPr/>
+                    <a:lstStyle/>
+                    <a:p>
+                      <a:pPr>
+                        <a:defRPr sz="1300"/>
+                      </a:pPr>
+                      <a:r>
+                        <a:t>3D model: up-weight the contrast term</a:t>
+                      </a:r>
+                    </a:p>
+                  </a:txBody>
+                  <a:tcPr/>
+                </a:tc>
+                <a:tc>
+                  <a:txBody>
+                    <a:bodyPr/>
+                    <a:lstStyle/>
+                    <a:p>
+                      <a:pPr>
+                        <a:defRPr sz="1300"/>
+                      </a:pPr>
+                      <a:r>
+                        <a:t>+0.014</a:t>
+                      </a:r>
+                    </a:p>
+                  </a:txBody>
+                  <a:tcPr/>
+                </a:tc>
+              </a:tr>
+              <a:tr h="333756">
+                <a:tc>
+                  <a:txBody>
+                    <a:bodyPr/>
+                    <a:lstStyle/>
+                    <a:p>
+                      <a:pPr>
+                        <a:defRPr sz="1300"/>
+                      </a:pPr>
+                      <a:r>
+                        <a:t>conditions injected into the 3D representation</a:t>
+                      </a:r>
+                    </a:p>
+                  </a:txBody>
+                  <a:tcPr/>
+                </a:tc>
+                <a:tc>
+                  <a:txBody>
+                    <a:bodyPr/>
+                    <a:lstStyle/>
+                    <a:p>
+                      <a:pPr>
+                        <a:defRPr sz="1300"/>
+                      </a:pPr>
+                      <a:r>
+                        <a:t>−0.108</a:t>
+                      </a:r>
+                    </a:p>
+                  </a:txBody>
+                  <a:tcPr/>
+                </a:tc>
+                <a:tc>
+                  <a:txBody>
+                    <a:bodyPr/>
+                    <a:lstStyle/>
+                    <a:p>
+                      <a:pPr>
+                        <a:defRPr sz="1300"/>
+                      </a:pPr>
+                      <a:r>
+                        <a:t>same change on a second architecture</a:t>
+                      </a:r>
+                    </a:p>
+                  </a:txBody>
+                  <a:tcPr/>
+                </a:tc>
+                <a:tc>
+                  <a:txBody>
+                    <a:bodyPr/>
+                    <a:lstStyle/>
+                    <a:p>
+                      <a:pPr>
+                        <a:defRPr sz="1300"/>
+                      </a:pPr>
+                      <a:r>
+                        <a:t>+0.015</a:t>
+                      </a:r>
+                    </a:p>
+                  </a:txBody>
+                  <a:tcPr/>
+                </a:tc>
+              </a:tr>
+            </a:tbl>
+          </a:graphicData>
+        </a:graphic>
+      </p:graphicFrame>
+      <p:sp>
+        <p:nvSpPr>
+          <p:cNvPr id="4" name="TextBox 3"/>
+          <p:cNvSpPr txBox="1"/>
+          <p:nvPr/>
+        </p:nvSpPr>
+        <p:spPr>
+          <a:xfrm>
+            <a:off x="548640" y="3429000"/>
+            <a:ext cx="11064240" cy="3246120"/>
+          </a:xfrm>
+          <a:prstGeom prst="rect">
+            <a:avLst/>
+          </a:prstGeom>
+          <a:noFill/>
+        </p:spPr>
+        <p:txBody>
+          <a:bodyPr wrap="square">
+            <a:spAutoFit/>
+          </a:bodyPr>
+          <a:lstStyle/>
+          <a:p>
+            <a:pPr>
+              <a:spcAft>
+                <a:spcPts val="700"/>
+              </a:spcAft>
+              <a:defRPr sz="1400">
+                <a:solidFill>
+                  <a:srgbClr val="101214"/>
+                </a:solidFill>
+              </a:defRPr>
+            </a:pPr>
+            <a:r>
+              <a:t>Every structure-side improvement left the score unchanged or worse; every surviving gain came from aligning the training loss with the scored separation.</a:t>
+            </a:r>
+          </a:p>
+          <a:p>
+            <a:pPr>
+              <a:spcAft>
+                <a:spcPts val="700"/>
+              </a:spcAft>
+              <a:defRPr sz="1400">
+                <a:solidFill>
+                  <a:srgbClr val="101214"/>
+                </a:solidFill>
+              </a:defRPr>
+            </a:pPr>
+            <a:r>
+              <a:t>The labels support roughly R² ≈ 0.53 (repeat measurements of the same separation agree to 0.153 on a spread of 0.224). Current best: 0.31. Geometry explains about 1 % of the remaining variance.</a:t>
+            </a:r>
+          </a:p>
+        </p:txBody>
+      </p:sp>
+    </p:spTree>
+  </p:cSld>
+  <p:clrMapOvr>
+    <a:masterClrMapping/>
+  </p:clrMapOvr>
+</p:sld>
+</file>
+
+<file path=ppt/slides/slide12.xml><?xml version="1.0" encoding="utf-8"?>
+<p:sld xmlns:a="http://schemas.openxmlformats.org/drawingml/2006/main" xmlns:p="http://schemas.openxmlformats.org/presentationml/2006/main" xmlns:r="http://schemas.openxmlformats.org/officeDocument/2006/relationships">
+  <p:cSld>
+    <p:spTree>
+      <p:nvGrpSpPr>
+        <p:cNvPr id="1" name=""/>
+        <p:cNvGrpSpPr/>
+        <p:nvPr/>
+      </p:nvGrpSpPr>
+      <p:grpSpPr/>
+      <p:sp>
+        <p:nvSpPr>
+          <p:cNvPr id="2" name="TextBox 1"/>
+          <p:cNvSpPr txBox="1"/>
+          <p:nvPr/>
+        </p:nvSpPr>
+        <p:spPr>
+          <a:xfrm>
+            <a:off x="502920" y="292608"/>
+            <a:ext cx="11247120" cy="640080"/>
+          </a:xfrm>
+          <a:prstGeom prst="rect">
+            <a:avLst/>
+          </a:prstGeom>
+          <a:noFill/>
+        </p:spPr>
+        <p:txBody>
+          <a:bodyPr wrap="none">
+            <a:spAutoFit/>
+          </a:bodyPr>
+          <a:lstStyle/>
+          <a:p>
+            <a:pPr>
+              <a:defRPr sz="2600" b="1">
+                <a:solidFill>
+                  <a:srgbClr val="1A2E4A"/>
+                </a:solidFill>
+              </a:defRPr>
+            </a:pPr>
+            <a:r>
+              <a:t>Summary</a:t>
+            </a:r>
+          </a:p>
+        </p:txBody>
+      </p:sp>
+      <p:sp>
+        <p:nvSpPr>
+          <p:cNvPr id="3" name="TextBox 2"/>
+          <p:cNvSpPr txBox="1"/>
+          <p:nvPr/>
+        </p:nvSpPr>
+        <p:spPr>
+          <a:xfrm>
+            <a:off x="548640" y="1234440"/>
+            <a:ext cx="11064240" cy="5440679"/>
+          </a:xfrm>
+          <a:prstGeom prst="rect">
+            <a:avLst/>
+          </a:prstGeom>
+          <a:noFill/>
+        </p:spPr>
+        <p:txBody>
+          <a:bodyPr wrap="square">
+            <a:spAutoFit/>
+          </a:bodyPr>
+          <a:lstStyle/>
+          <a:p>
+            <a:pPr>
+              <a:spcAft>
+                <a:spcPts val="700"/>
+              </a:spcAft>
+              <a:defRPr sz="1550">
+                <a:solidFill>
+                  <a:srgbClr val="101214"/>
+                </a:solidFill>
+              </a:defRPr>
+            </a:pPr>
+            <a:r>
+              <a:t>1.  The best system includes the 3D structure model: 0.313 vs 0.291 without it, largest fitted weight. Its contribution is correcting errors the conventional models share — and it is not reproducible by handing the trees 3D-derived descriptors.</a:t>
+            </a:r>
+          </a:p>
+          <a:p>
+            <a:pPr>
+              <a:spcAft>
+                <a:spcPts val="700"/>
+              </a:spcAft>
+              <a:defRPr sz="1550">
+                <a:solidFill>
+                  <a:srgbClr val="101214"/>
+                </a:solidFill>
+              </a:defRPr>
+            </a:pPr>
+            <a:r>
+              <a:t>2.  The ceiling on 3D is the quantum chemistry: GFN2-xTB carries no f-shell physics and under-responds to the lanthanide contraction 2.5×. Fixing the chemistry (g-xTB: right to within 8 %, 71/71 ligands, p = 5×10⁻⁵²) does not move the prediction — a new, standalone benchmark result.</a:t>
+            </a:r>
+          </a:p>
+          <a:p>
+            <a:pPr>
+              <a:spcAft>
+                <a:spcPts val="700"/>
+              </a:spcAft>
+              <a:defRPr sz="1550">
+                <a:solidFill>
+                  <a:srgbClr val="101214"/>
+                </a:solidFill>
+              </a:defRPr>
+            </a:pPr>
+            <a:r>
+              <a:t>3.  What moved predictions, every time, was aligning the training loss with the scored separation — not richer structures.</a:t>
+            </a:r>
+          </a:p>
+          <a:p>
+            <a:pPr>
+              <a:spcAft>
+                <a:spcPts val="700"/>
+              </a:spcAft>
+              <a:defRPr sz="1550">
+                <a:solidFill>
+                  <a:srgbClr val="101214"/>
+                </a:solidFill>
+              </a:defRPr>
+            </a:pPr>
+          </a:p>
+          <a:p>
+            <a:pPr>
+              <a:spcAft>
+                <a:spcPts val="700"/>
+              </a:spcAft>
+              <a:defRPr sz="1550">
+                <a:solidFill>
+                  <a:srgbClr val="52514E"/>
+                </a:solidFill>
+              </a:defRPr>
+            </a:pPr>
+            <a:r>
+              <a:t>Next: a fresh held-out split to confirm 0.313; the contraction benchmark as a paper (adding Ln-xTB, Zhang 2026); predicting separations directly, toward the 0.53 that the labels support.</a:t>
             </a:r>
           </a:p>
         </p:txBody>
@@ -4121,7 +5066,137 @@
               </a:defRPr>
             </a:pPr>
             <a:r>
-              <a:t>Data: from curated literature to learnable objects</a:t>
+              <a:t>The problem: separating neighbouring lanthanides</a:t>
+            </a:r>
+          </a:p>
+        </p:txBody>
+      </p:sp>
+      <p:sp>
+        <p:nvSpPr>
+          <p:cNvPr id="3" name="TextBox 2"/>
+          <p:cNvSpPr txBox="1"/>
+          <p:nvPr/>
+        </p:nvSpPr>
+        <p:spPr>
+          <a:xfrm>
+            <a:off x="548640" y="1234440"/>
+            <a:ext cx="11064240" cy="5440679"/>
+          </a:xfrm>
+          <a:prstGeom prst="rect">
+            <a:avLst/>
+          </a:prstGeom>
+          <a:noFill/>
+        </p:spPr>
+        <p:txBody>
+          <a:bodyPr wrap="square">
+            <a:spAutoFit/>
+          </a:bodyPr>
+          <a:lstStyle/>
+          <a:p>
+            <a:pPr>
+              <a:spcAft>
+                <a:spcPts val="700"/>
+              </a:spcAft>
+              <a:defRPr sz="1450">
+                <a:solidFill>
+                  <a:srgbClr val="101214"/>
+                </a:solidFill>
+              </a:defRPr>
+            </a:pPr>
+            <a:r>
+              <a:t>Rare earths are separated by liquid–liquid extraction with designed organic molecules (extractants). Neighbouring lanthanides are the hard case: their 3+ ions differ by ~0.013 Å in radius and in almost nothing else.</a:t>
+            </a:r>
+          </a:p>
+          <a:p>
+            <a:pPr>
+              <a:spcAft>
+                <a:spcPts val="700"/>
+              </a:spcAft>
+              <a:defRPr sz="1450">
+                <a:solidFill>
+                  <a:srgbClr val="101214"/>
+                </a:solidFill>
+              </a:defRPr>
+            </a:pPr>
+            <a:r>
+              <a:t>We predict how well an extractant separates two neighbouring lanthanides — the difference in log D under identical conditions:</a:t>
+            </a:r>
+          </a:p>
+        </p:txBody>
+      </p:sp>
+      <p:pic>
+        <p:nvPicPr>
+          <p:cNvPr id="4" name="Picture 3" descr="g1_pairs.png"/>
+          <p:cNvPicPr>
+            <a:picLocks noChangeAspect="1"/>
+          </p:cNvPicPr>
+          <p:nvPr/>
+        </p:nvPicPr>
+        <p:blipFill>
+          <a:blip r:embed="rId3"/>
+          <a:stretch>
+            <a:fillRect/>
+          </a:stretch>
+        </p:blipFill>
+        <p:spPr>
+          <a:xfrm>
+            <a:off x="1158087" y="2880360"/>
+            <a:ext cx="9875520" cy="3103734"/>
+          </a:xfrm>
+          <a:prstGeom prst="rect">
+            <a:avLst/>
+          </a:prstGeom>
+        </p:spPr>
+      </p:pic>
+    </p:spTree>
+  </p:cSld>
+  <p:clrMapOvr>
+    <a:masterClrMapping/>
+  </p:clrMapOvr>
+</p:sld>
+</file>
+
+<file path=ppt/slides/slide3.xml><?xml version="1.0" encoding="utf-8"?>
+<p:sld xmlns:a="http://schemas.openxmlformats.org/drawingml/2006/main" xmlns:p="http://schemas.openxmlformats.org/presentationml/2006/main" xmlns:r="http://schemas.openxmlformats.org/officeDocument/2006/relationships">
+  <p:cSld>
+    <p:spTree>
+      <p:nvGrpSpPr>
+        <p:cNvPr id="1" name=""/>
+        <p:cNvGrpSpPr/>
+        <p:nvPr/>
+      </p:nvGrpSpPr>
+      <p:grpSpPr/>
+      <p:sp>
+        <p:nvSpPr>
+          <p:cNvPr id="2" name="TextBox 1"/>
+          <p:cNvSpPr txBox="1"/>
+          <p:nvPr/>
+        </p:nvSpPr>
+        <p:spPr>
+          <a:xfrm>
+            <a:off x="502920" y="292608"/>
+            <a:ext cx="11247120" cy="640080"/>
+          </a:xfrm>
+          <a:prstGeom prst="rect">
+            <a:avLst/>
+          </a:prstGeom>
+          <a:noFill/>
+        </p:spPr>
+        <p:txBody>
+          <a:bodyPr wrap="none">
+            <a:spAutoFit/>
+          </a:bodyPr>
+          <a:lstStyle/>
+          <a:p>
+            <a:pPr>
+              <a:defRPr sz="2600" b="1">
+                <a:solidFill>
+                  <a:srgbClr val="1A2E4A"/>
+                </a:solidFill>
+              </a:defRPr>
+            </a:pPr>
+            <a:r>
+              <a:t>Data: a curated literature database, then quantum-chemistry structures</a:t>
             </a:r>
           </a:p>
         </p:txBody>
@@ -4145,8 +5220,8 @@
                 <a:tableStyleId>{5C22544A-7EE6-4342-B048-85BDC9FD1C3A}</a:tableStyleId>
               </a:tblPr>
               <a:tblGrid>
-                <a:gridCol w="2377440"/>
-                <a:gridCol w="8503920"/>
+                <a:gridCol w="2286000"/>
+                <a:gridCol w="8595360"/>
               </a:tblGrid>
               <a:tr h="356616">
                 <a:tc>
@@ -4181,7 +5256,7 @@
                         </a:defRPr>
                       </a:pPr>
                       <a:r>
-                        <a:t>SAFE database: 48,138 measurements · 31 elements · 181 publications, each row DOI-linked with full conditions</a:t>
+                        <a:t>SAFE database: 48,138 measurements · 31 elements · 181 publications, every row DOI-linked with full conditions (extractant, acid, diluent, concentrations, temperature)</a:t>
                       </a:r>
                     </a:p>
                   </a:txBody>
@@ -4213,7 +5288,7 @@
                         <a:defRPr sz="1350"/>
                       </a:pPr>
                       <a:r>
-                        <a:t>4,746 measurements · 162 extractants · 14 lanthanides · target log D (distribution ratio)</a:t>
+                        <a:t>4,746 measurements · 162 extractants · 14 lanthanides · target: log D</a:t>
                       </a:r>
                     </a:p>
                   </a:txBody>
@@ -4233,8 +5308,8 @@
           <p:nvPr/>
         </p:nvGraphicFramePr>
         <p:xfrm>
-          <a:off x="640080" y="2788920"/>
-          <a:ext cx="10881360" cy="1645920"/>
+          <a:off x="640080" y="2834640"/>
+          <a:ext cx="10881360" cy="1335024"/>
         </p:xfrm>
         <a:graphic>
           <a:graphicData uri="http://schemas.openxmlformats.org/drawingml/2006/table">
@@ -4243,11 +5318,11 @@
                 <a:tableStyleId>{5C22544A-7EE6-4342-B048-85BDC9FD1C3A}</a:tableStyleId>
               </a:tblPr>
               <a:tblGrid>
-                <a:gridCol w="2286000"/>
-                <a:gridCol w="2468880"/>
-                <a:gridCol w="6126480"/>
+                <a:gridCol w="3108960"/>
+                <a:gridCol w="2743200"/>
+                <a:gridCol w="5029200"/>
               </a:tblGrid>
-              <a:tr h="329184">
+              <a:tr h="333756">
                 <a:tc>
                   <a:txBody>
                     <a:bodyPr/>
@@ -4306,7 +5381,7 @@
                   <a:tcPr/>
                 </a:tc>
               </a:tr>
-              <a:tr h="329184">
+              <a:tr h="333756">
                 <a:tc>
                   <a:txBody>
                     <a:bodyPr/>
@@ -4316,7 +5391,7 @@
                         <a:defRPr sz="1350"/>
                       </a:pPr>
                       <a:r>
-                        <a:t>complex assembly</a:t>
+                        <a:t>assemble the extraction complex</a:t>
                       </a:r>
                     </a:p>
                   </a:txBody>
@@ -4346,14 +5421,14 @@
                         <a:defRPr sz="1350"/>
                       </a:pPr>
                       <a:r>
-                        <a:t>3D guess per (extractant, Ln, anion/water fill), CN 8–9</a:t>
+                        <a:t>3D structure guess per (extractant, lanthanide, nitrate/water fill), coordination number 8–9</a:t>
                       </a:r>
                     </a:p>
                   </a:txBody>
                   <a:tcPr/>
                 </a:tc>
               </a:tr>
-              <a:tr h="329184">
+              <a:tr h="333756">
                 <a:tc>
                   <a:txBody>
                     <a:bodyPr/>
@@ -4363,7 +5438,7 @@
                         <a:defRPr sz="1350"/>
                       </a:pPr>
                       <a:r>
-                        <a:t>relaxation</a:t>
+                        <a:t>relax it</a:t>
                       </a:r>
                     </a:p>
                   </a:txBody>
@@ -4378,7 +5453,7 @@
                         <a:defRPr sz="1350"/>
                       </a:pPr>
                       <a:r>
-                        <a:t>GFN2-xTB, ALPB water</a:t>
+                        <a:t>GFN2-xTB (tight-binding QM), water solvation</a:t>
                       </a:r>
                     </a:p>
                   </a:txBody>
@@ -4393,14 +5468,14 @@
                         <a:defRPr sz="1350"/>
                       </a:pPr>
                       <a:r>
-                        <a:t>956 unique optimised complexes, force-checked</a:t>
+                        <a:t>956 unique optimised complexes, convergence force-checked</a:t>
                       </a:r>
                     </a:p>
                   </a:txBody>
                   <a:tcPr/>
                 </a:tc>
               </a:tr>
-              <a:tr h="329184">
+              <a:tr h="333756">
                 <a:tc>
                   <a:txBody>
                     <a:bodyPr/>
@@ -4410,7 +5485,7 @@
                         <a:defRPr sz="1350"/>
                       </a:pPr>
                       <a:r>
-                        <a:t>3D object</a:t>
+                        <a:t>descriptors</a:t>
                       </a:r>
                     </a:p>
                   </a:txBody>
@@ -4425,7 +5500,7 @@
                         <a:defRPr sz="1350"/>
                       </a:pPr>
                       <a:r>
-                        <a:t>Vietoris–Rips, 3.5 Å</a:t>
+                        <a:t>RDKit, fingerprints, conditions</a:t>
                       </a:r>
                     </a:p>
                   </a:txBody>
@@ -4440,54 +5515,7 @@
                         <a:defRPr sz="1350"/>
                       </a:pPr>
                       <a:r>
-                        <a:t>nodes, edges, triangles + xTB charges; no raw coordinates enter the network</a:t>
-                      </a:r>
-                    </a:p>
-                  </a:txBody>
-                  <a:tcPr/>
-                </a:tc>
-              </a:tr>
-              <a:tr h="329184">
-                <a:tc>
-                  <a:txBody>
-                    <a:bodyPr/>
-                    <a:lstStyle/>
-                    <a:p>
-                      <a:pPr>
-                        <a:defRPr sz="1350"/>
-                      </a:pPr>
-                      <a:r>
-                        <a:t>tabular features</a:t>
-                      </a:r>
-                    </a:p>
-                  </a:txBody>
-                  <a:tcPr/>
-                </a:tc>
-                <a:tc>
-                  <a:txBody>
-                    <a:bodyPr/>
-                    <a:lstStyle/>
-                    <a:p>
-                      <a:pPr>
-                        <a:defRPr sz="1350"/>
-                      </a:pPr>
-                      <a:r>
-                        <a:t>RDKit · ECFP · conditions</a:t>
-                      </a:r>
-                    </a:p>
-                  </a:txBody>
-                  <a:tcPr/>
-                </a:tc>
-                <a:tc>
-                  <a:txBody>
-                    <a:bodyPr/>
-                    <a:lstStyle/>
-                    <a:p>
-                      <a:pPr>
-                        <a:defRPr sz="1350"/>
-                      </a:pPr>
-                      <a:r>
-                        <a:t>746 columns, incl. 64 condition columns</a:t>
+                        <a:t>746-column table per measurement</a:t>
                       </a:r>
                     </a:p>
                   </a:txBody>
@@ -4506,7 +5534,7 @@
 </p:sld>
 </file>
 
-<file path=ppt/slides/slide3.xml><?xml version="1.0" encoding="utf-8"?>
+<file path=ppt/slides/slide4.xml><?xml version="1.0" encoding="utf-8"?>
 <p:sld xmlns:a="http://schemas.openxmlformats.org/drawingml/2006/main" xmlns:p="http://schemas.openxmlformats.org/presentationml/2006/main" xmlns:r="http://schemas.openxmlformats.org/officeDocument/2006/relationships">
   <p:cSld>
     <p:spTree>
@@ -4546,67 +5574,14 @@
               </a:defRPr>
             </a:pPr>
             <a:r>
-              <a:t>The task, and why it is hard</a:t>
-            </a:r>
-          </a:p>
-        </p:txBody>
-      </p:sp>
-      <p:sp>
-        <p:nvSpPr>
-          <p:cNvPr id="3" name="TextBox 2"/>
-          <p:cNvSpPr txBox="1"/>
-          <p:nvPr/>
-        </p:nvSpPr>
-        <p:spPr>
-          <a:xfrm>
-            <a:off x="548640" y="1234440"/>
-            <a:ext cx="11064240" cy="5440679"/>
-          </a:xfrm>
-          <a:prstGeom prst="rect">
-            <a:avLst/>
-          </a:prstGeom>
-          <a:noFill/>
-        </p:spPr>
-        <p:txBody>
-          <a:bodyPr wrap="square">
-            <a:spAutoFit/>
-          </a:bodyPr>
-          <a:lstStyle/>
-          <a:p>
-            <a:pPr>
-              <a:spcAft>
-                <a:spcPts val="600"/>
-              </a:spcAft>
-              <a:defRPr sz="1400">
-                <a:solidFill>
-                  <a:srgbClr val="101214"/>
-                </a:solidFill>
-              </a:defRPr>
-            </a:pPr>
-            <a:r>
-              <a:t>Predict the difference in log D between adjacent lanthanides, same extractant and conditions (905 pairs). R² = 0 means predicting the average separation; adjacent ionic radii differ by 0.013 Å.</a:t>
-            </a:r>
-          </a:p>
-          <a:p>
-            <a:pPr>
-              <a:spcAft>
-                <a:spcPts val="600"/>
-              </a:spcAft>
-              <a:defRPr sz="1400">
-                <a:solidFill>
-                  <a:srgbClr val="101214"/>
-                </a:solidFill>
-              </a:defRPr>
-            </a:pPr>
-            <a:r>
-              <a:t>Leave-extractants-out CV (5 folds × 3 repeats), 16–32-seed ensembles, scored out-of-fold.</a:t>
+              <a:t>How every number in this talk is evaluated</a:t>
             </a:r>
           </a:p>
         </p:txBody>
       </p:sp>
       <p:pic>
         <p:nvPicPr>
-          <p:cNvPr id="4" name="Picture 3" descr="f3_pca.png"/>
+          <p:cNvPr id="3" name="Picture 2" descr="g2_cv.png"/>
           <p:cNvPicPr>
             <a:picLocks noChangeAspect="1"/>
           </p:cNvPicPr>
@@ -4620,488 +5595,14 @@
         </p:blipFill>
         <p:spPr>
           <a:xfrm>
-            <a:off x="1249527" y="2377440"/>
-            <a:ext cx="9692640" cy="3906814"/>
+            <a:off x="929487" y="1280160"/>
+            <a:ext cx="10332720" cy="3731260"/>
           </a:xfrm>
           <a:prstGeom prst="rect">
             <a:avLst/>
           </a:prstGeom>
         </p:spPr>
       </p:pic>
-    </p:spTree>
-  </p:cSld>
-  <p:clrMapOvr>
-    <a:masterClrMapping/>
-  </p:clrMapOvr>
-</p:sld>
-</file>
-
-<file path=ppt/slides/slide4.xml><?xml version="1.0" encoding="utf-8"?>
-<p:sld xmlns:a="http://schemas.openxmlformats.org/drawingml/2006/main" xmlns:p="http://schemas.openxmlformats.org/presentationml/2006/main" xmlns:r="http://schemas.openxmlformats.org/officeDocument/2006/relationships">
-  <p:cSld>
-    <p:spTree>
-      <p:nvGrpSpPr>
-        <p:cNvPr id="1" name=""/>
-        <p:cNvGrpSpPr/>
-        <p:nvPr/>
-      </p:nvGrpSpPr>
-      <p:grpSpPr/>
-      <p:sp>
-        <p:nvSpPr>
-          <p:cNvPr id="2" name="TextBox 1"/>
-          <p:cNvSpPr txBox="1"/>
-          <p:nvPr/>
-        </p:nvSpPr>
-        <p:spPr>
-          <a:xfrm>
-            <a:off x="502920" y="292608"/>
-            <a:ext cx="11247120" cy="640080"/>
-          </a:xfrm>
-          <a:prstGeom prst="rect">
-            <a:avLst/>
-          </a:prstGeom>
-          <a:noFill/>
-        </p:spPr>
-        <p:txBody>
-          <a:bodyPr wrap="none">
-            <a:spAutoFit/>
-          </a:bodyPr>
-          <a:lstStyle/>
-          <a:p>
-            <a:pPr>
-              <a:defRPr sz="2600" b="1">
-                <a:solidFill>
-                  <a:srgbClr val="1A2E4A"/>
-                </a:solidFill>
-              </a:defRPr>
-            </a:pPr>
-            <a:r>
-              <a:t>Results: what changed since July, and what the 3D encoder adds</a:t>
-            </a:r>
-          </a:p>
-        </p:txBody>
-      </p:sp>
-      <p:graphicFrame>
-        <p:nvGraphicFramePr>
-          <p:cNvPr id="3" name="Table 2"/>
-          <p:cNvGraphicFramePr>
-            <a:graphicFrameLocks noGrp="1"/>
-          </p:cNvGraphicFramePr>
-          <p:nvPr/>
-        </p:nvGraphicFramePr>
-        <p:xfrm>
-          <a:off x="640080" y="1371600"/>
-          <a:ext cx="10241280" cy="2267712"/>
-        </p:xfrm>
-        <a:graphic>
-          <a:graphicData uri="http://schemas.openxmlformats.org/drawingml/2006/table">
-            <a:tbl>
-              <a:tblPr firstRow="1" bandRow="1">
-                <a:tableStyleId>{5C22544A-7EE6-4342-B048-85BDC9FD1C3A}</a:tableStyleId>
-              </a:tblPr>
-              <a:tblGrid>
-                <a:gridCol w="6949440"/>
-                <a:gridCol w="1645920"/>
-                <a:gridCol w="1645920"/>
-              </a:tblGrid>
-              <a:tr h="323958">
-                <a:tc>
-                  <a:txBody>
-                    <a:bodyPr/>
-                    <a:lstStyle/>
-                    <a:p>
-                      <a:pPr>
-                        <a:defRPr sz="1350" b="1">
-                          <a:solidFill>
-                            <a:srgbClr val="FFFFFF"/>
-                          </a:solidFill>
-                        </a:defRPr>
-                      </a:pPr>
-                      <a:r>
-                        <a:t>model (adjacent-pair R², LOEO)</a:t>
-                      </a:r>
-                    </a:p>
-                  </a:txBody>
-                  <a:tcPr/>
-                </a:tc>
-                <a:tc>
-                  <a:txBody>
-                    <a:bodyPr/>
-                    <a:lstStyle/>
-                    <a:p>
-                      <a:pPr>
-                        <a:defRPr sz="1350" b="1">
-                          <a:solidFill>
-                            <a:srgbClr val="FFFFFF"/>
-                          </a:solidFill>
-                        </a:defRPr>
-                      </a:pPr>
-                      <a:r>
-                        <a:t>July</a:t>
-                      </a:r>
-                    </a:p>
-                  </a:txBody>
-                  <a:tcPr/>
-                </a:tc>
-                <a:tc>
-                  <a:txBody>
-                    <a:bodyPr/>
-                    <a:lstStyle/>
-                    <a:p>
-                      <a:pPr>
-                        <a:defRPr sz="1350" b="1">
-                          <a:solidFill>
-                            <a:srgbClr val="FFFFFF"/>
-                          </a:solidFill>
-                        </a:defRPr>
-                      </a:pPr>
-                      <a:r>
-                        <a:t>today</a:t>
-                      </a:r>
-                    </a:p>
-                  </a:txBody>
-                  <a:tcPr/>
-                </a:tc>
-              </a:tr>
-              <a:tr h="323958">
-                <a:tc>
-                  <a:txBody>
-                    <a:bodyPr/>
-                    <a:lstStyle/>
-                    <a:p>
-                      <a:pPr>
-                        <a:defRPr sz="1350"/>
-                      </a:pPr>
-                      <a:r>
-                        <a:t>gradient boosting, 2D descriptors</a:t>
-                      </a:r>
-                    </a:p>
-                  </a:txBody>
-                  <a:tcPr/>
-                </a:tc>
-                <a:tc>
-                  <a:txBody>
-                    <a:bodyPr/>
-                    <a:lstStyle/>
-                    <a:p>
-                      <a:pPr>
-                        <a:defRPr sz="1350"/>
-                      </a:pPr>
-                      <a:r>
-                        <a:t>0.142</a:t>
-                      </a:r>
-                    </a:p>
-                  </a:txBody>
-                  <a:tcPr/>
-                </a:tc>
-                <a:tc>
-                  <a:txBody>
-                    <a:bodyPr/>
-                    <a:lstStyle/>
-                    <a:p>
-                      <a:pPr>
-                        <a:defRPr sz="1350"/>
-                      </a:pPr>
-                      <a:r>
-                        <a:t>0.278</a:t>
-                      </a:r>
-                    </a:p>
-                  </a:txBody>
-                  <a:tcPr/>
-                </a:tc>
-              </a:tr>
-              <a:tr h="323958">
-                <a:tc>
-                  <a:txBody>
-                    <a:bodyPr/>
-                    <a:lstStyle/>
-                    <a:p>
-                      <a:pPr>
-                        <a:defRPr sz="1350"/>
-                      </a:pPr>
-                      <a:r>
-                        <a:t>fingerprint network</a:t>
-                      </a:r>
-                    </a:p>
-                  </a:txBody>
-                  <a:tcPr/>
-                </a:tc>
-                <a:tc>
-                  <a:txBody>
-                    <a:bodyPr/>
-                    <a:lstStyle/>
-                    <a:p>
-                      <a:pPr>
-                        <a:defRPr sz="1350"/>
-                      </a:pPr>
-                      <a:r>
-                        <a:t>0.221</a:t>
-                      </a:r>
-                    </a:p>
-                  </a:txBody>
-                  <a:tcPr/>
-                </a:tc>
-                <a:tc>
-                  <a:txBody>
-                    <a:bodyPr/>
-                    <a:lstStyle/>
-                    <a:p>
-                      <a:pPr>
-                        <a:defRPr sz="1350"/>
-                      </a:pPr>
-                      <a:r>
-                        <a:t>0.221</a:t>
-                      </a:r>
-                    </a:p>
-                  </a:txBody>
-                  <a:tcPr/>
-                </a:tc>
-              </a:tr>
-              <a:tr h="323958">
-                <a:tc>
-                  <a:txBody>
-                    <a:bodyPr/>
-                    <a:lstStyle/>
-                    <a:p>
-                      <a:pPr>
-                        <a:defRPr sz="1350"/>
-                      </a:pPr>
-                      <a:r>
-                        <a:t>3D encoder (Vietoris–Rips, simplicial message passing)</a:t>
-                      </a:r>
-                    </a:p>
-                  </a:txBody>
-                  <a:tcPr/>
-                </a:tc>
-                <a:tc>
-                  <a:txBody>
-                    <a:bodyPr/>
-                    <a:lstStyle/>
-                    <a:p>
-                      <a:pPr>
-                        <a:defRPr sz="1350"/>
-                      </a:pPr>
-                      <a:r>
-                        <a:t>0.238</a:t>
-                      </a:r>
-                    </a:p>
-                  </a:txBody>
-                  <a:tcPr/>
-                </a:tc>
-                <a:tc>
-                  <a:txBody>
-                    <a:bodyPr/>
-                    <a:lstStyle/>
-                    <a:p>
-                      <a:pPr>
-                        <a:defRPr sz="1350"/>
-                      </a:pPr>
-                      <a:r>
-                        <a:t>0.266</a:t>
-                      </a:r>
-                    </a:p>
-                  </a:txBody>
-                  <a:tcPr/>
-                </a:tc>
-              </a:tr>
-              <a:tr h="323958">
-                <a:tc>
-                  <a:txBody>
-                    <a:bodyPr/>
-                    <a:lstStyle/>
-                    <a:p>
-                      <a:pPr>
-                        <a:defRPr sz="1350"/>
-                      </a:pPr>
-                      <a:r>
-                        <a:t>2D stack (boosting + fingerprint)</a:t>
-                      </a:r>
-                    </a:p>
-                  </a:txBody>
-                  <a:tcPr/>
-                </a:tc>
-                <a:tc>
-                  <a:txBody>
-                    <a:bodyPr/>
-                    <a:lstStyle/>
-                    <a:p>
-                      <a:pPr>
-                        <a:defRPr sz="1350"/>
-                      </a:pPr>
-                      <a:r>
-                        <a:t>—</a:t>
-                      </a:r>
-                    </a:p>
-                  </a:txBody>
-                  <a:tcPr/>
-                </a:tc>
-                <a:tc>
-                  <a:txBody>
-                    <a:bodyPr/>
-                    <a:lstStyle/>
-                    <a:p>
-                      <a:pPr>
-                        <a:defRPr sz="1350"/>
-                      </a:pPr>
-                      <a:r>
-                        <a:t>0.291</a:t>
-                      </a:r>
-                    </a:p>
-                  </a:txBody>
-                  <a:tcPr/>
-                </a:tc>
-              </a:tr>
-              <a:tr h="323958">
-                <a:tc>
-                  <a:txBody>
-                    <a:bodyPr/>
-                    <a:lstStyle/>
-                    <a:p>
-                      <a:pPr>
-                        <a:defRPr sz="1350"/>
-                      </a:pPr>
-                      <a:r>
-                        <a:t>2D stack + 3D encoder</a:t>
-                      </a:r>
-                    </a:p>
-                  </a:txBody>
-                  <a:tcPr/>
-                </a:tc>
-                <a:tc>
-                  <a:txBody>
-                    <a:bodyPr/>
-                    <a:lstStyle/>
-                    <a:p>
-                      <a:pPr>
-                        <a:defRPr sz="1350"/>
-                      </a:pPr>
-                      <a:r>
-                        <a:t>0.267</a:t>
-                      </a:r>
-                    </a:p>
-                  </a:txBody>
-                  <a:tcPr/>
-                </a:tc>
-                <a:tc>
-                  <a:txBody>
-                    <a:bodyPr/>
-                    <a:lstStyle/>
-                    <a:p>
-                      <a:pPr>
-                        <a:defRPr sz="1350"/>
-                      </a:pPr>
-                      <a:r>
-                        <a:t>0.313</a:t>
-                      </a:r>
-                    </a:p>
-                  </a:txBody>
-                  <a:tcPr/>
-                </a:tc>
-              </a:tr>
-              <a:tr h="323964">
-                <a:tc>
-                  <a:txBody>
-                    <a:bodyPr/>
-                    <a:lstStyle/>
-                    <a:p>
-                      <a:pPr>
-                        <a:defRPr sz="1350"/>
-                      </a:pPr>
-                      <a:r>
-                        <a:t>control: same boosting + 84 3D-derived tabular columns</a:t>
-                      </a:r>
-                    </a:p>
-                  </a:txBody>
-                  <a:tcPr/>
-                </a:tc>
-                <a:tc>
-                  <a:txBody>
-                    <a:bodyPr/>
-                    <a:lstStyle/>
-                    <a:p>
-                      <a:pPr>
-                        <a:defRPr sz="1350"/>
-                      </a:pPr>
-                      <a:r>
-                        <a:t>—</a:t>
-                      </a:r>
-                    </a:p>
-                  </a:txBody>
-                  <a:tcPr/>
-                </a:tc>
-                <a:tc>
-                  <a:txBody>
-                    <a:bodyPr/>
-                    <a:lstStyle/>
-                    <a:p>
-                      <a:pPr>
-                        <a:defRPr sz="1350"/>
-                      </a:pPr>
-                      <a:r>
-                        <a:t>−0.02</a:t>
-                      </a:r>
-                    </a:p>
-                  </a:txBody>
-                  <a:tcPr/>
-                </a:tc>
-              </a:tr>
-            </a:tbl>
-          </a:graphicData>
-        </a:graphic>
-      </p:graphicFrame>
-      <p:sp>
-        <p:nvSpPr>
-          <p:cNvPr id="4" name="TextBox 3"/>
-          <p:cNvSpPr txBox="1"/>
-          <p:nvPr/>
-        </p:nvSpPr>
-        <p:spPr>
-          <a:xfrm>
-            <a:off x="548640" y="4206240"/>
-            <a:ext cx="11064240" cy="2468880"/>
-          </a:xfrm>
-          <a:prstGeom prst="rect">
-            <a:avLst/>
-          </a:prstGeom>
-          <a:noFill/>
-        </p:spPr>
-        <p:txBody>
-          <a:bodyPr wrap="square">
-            <a:spAutoFit/>
-          </a:bodyPr>
-          <a:lstStyle/>
-          <a:p>
-            <a:pPr>
-              <a:spcAft>
-                <a:spcPts val="600"/>
-              </a:spcAft>
-              <a:defRPr sz="1350">
-                <a:solidFill>
-                  <a:srgbClr val="101214"/>
-                </a:solidFill>
-              </a:defRPr>
-            </a:pPr>
-            <a:r>
-              <a:t>The 3D encoder is no longer the strongest single model; the best system still needs it (largest stack weight, 0.46). Its value is correcting errors the 2D models share.</a:t>
-            </a:r>
-          </a:p>
-          <a:p>
-            <a:pPr>
-              <a:spcAft>
-                <a:spcPts val="600"/>
-              </a:spcAft>
-              <a:defRPr sz="1350">
-                <a:solidFill>
-                  <a:srgbClr val="52514E"/>
-                </a:solidFill>
-              </a:defRPr>
-            </a:pPr>
-            <a:r>
-              <a:t>Tabular 3D descriptors do not replicate it — they subtract. Under strict condition blocking the marginal falls to +0.010; the +0.313 is exploratory (no clean held-out partition left).</a:t>
-            </a:r>
-          </a:p>
-        </p:txBody>
-      </p:sp>
     </p:spTree>
   </p:cSld>
   <p:clrMapOvr>
@@ -5150,7 +5651,7 @@
               </a:defRPr>
             </a:pPr>
             <a:r>
-              <a:t>Why the 3D signal is capped: the Hamiltonian, not the encoders</a:t>
+              <a:t>Three models</a:t>
             </a:r>
           </a:p>
         </p:txBody>
@@ -5179,7 +5680,7 @@
           <a:p>
             <a:pPr>
               <a:spcAft>
-                <a:spcPts val="600"/>
+                <a:spcPts val="700"/>
               </a:spcAft>
               <a:defRPr sz="1550">
                 <a:solidFill>
@@ -5188,13 +5689,13 @@
               </a:defRPr>
             </a:pPr>
             <a:r>
-              <a:t>GFN2-xTB treats f-electrons in-core. Every lanthanide parameter from Ce to Lu is linear interpolation between two fitted anchors (residual 5×10⁻⁷).</a:t>
+              <a:t>Model 1 — gradient-boosted trees (CatBoost) on the 746 descriptor columns. No 3D input.</a:t>
             </a:r>
           </a:p>
           <a:p>
             <a:pPr>
               <a:spcAft>
-                <a:spcPts val="600"/>
+                <a:spcPts val="700"/>
               </a:spcAft>
               <a:defRPr sz="1550">
                 <a:solidFill>
@@ -5203,13 +5704,13 @@
               </a:defRPr>
             </a:pPr>
             <a:r>
-              <a:t>So metal identity enters every geometry as one scalar, linear in Z — no f-shell structure, no gadolinium break, no tetrad effect.</a:t>
+              <a:t>Model 2 — a neural network on molecular fingerprints. No 3D input.</a:t>
             </a:r>
           </a:p>
           <a:p>
             <a:pPr>
               <a:spcAft>
-                <a:spcPts val="600"/>
+                <a:spcPts val="700"/>
               </a:spcAft>
               <a:defRPr sz="1550">
                 <a:solidFill>
@@ -5218,13 +5719,13 @@
               </a:defRPr>
             </a:pPr>
             <a:r>
-              <a:t>Measured consequence: eight different 3D encoders are effectively identical (rank 1.05 of 8; cross-architecture correlation 0.986, equal to seed noise).</a:t>
+              <a:t>Model 3 — a network that reads the optimised 3D structure of the extraction complex itself (next slide).</a:t>
             </a:r>
           </a:p>
           <a:p>
             <a:pPr>
               <a:spcAft>
-                <a:spcPts val="600"/>
+                <a:spcPts val="700"/>
               </a:spcAft>
               <a:defRPr sz="1550">
                 <a:solidFill>
@@ -5232,8 +5733,20 @@
                 </a:solidFill>
               </a:defRPr>
             </a:pPr>
-            <a:r>
-              <a:t>That one scalar is already a tabular column: the Shannon ionic radius. An encoder reading these geometries re-derives a feature the models have.</a:t>
+          </a:p>
+          <a:p>
+            <a:pPr>
+              <a:spcAft>
+                <a:spcPts val="700"/>
+              </a:spcAft>
+              <a:defRPr sz="1550">
+                <a:solidFill>
+                  <a:srgbClr val="101214"/>
+                </a:solidFill>
+              </a:defRPr>
+            </a:pPr>
+            <a:r>
+              <a:t>Each predicts log D per measurement; separations are differences of predictions inside a block. The final system is a weighted combination of the three, with weights fitted per held-out extractant on the separations directly.</a:t>
             </a:r>
           </a:p>
         </p:txBody>
@@ -5286,14 +5799,14 @@
               </a:defRPr>
             </a:pPr>
             <a:r>
-              <a:t>The chemistry, measured against experiment</a:t>
+              <a:t>Model 3: reading the 3D structure</a:t>
             </a:r>
           </a:p>
         </p:txBody>
       </p:sp>
       <p:pic>
         <p:nvPicPr>
-          <p:cNvPr id="3" name="Picture 2" descr="f5_contraction.png"/>
+          <p:cNvPr id="3" name="Picture 2" descr="g3_vr.png"/>
           <p:cNvPicPr>
             <a:picLocks noChangeAspect="1"/>
           </p:cNvPicPr>
@@ -5307,8 +5820,8 @@
         </p:blipFill>
         <p:spPr>
           <a:xfrm>
-            <a:off x="2163927" y="1280160"/>
-            <a:ext cx="7863840" cy="3646441"/>
+            <a:off x="518007" y="1325880"/>
+            <a:ext cx="11155680" cy="3098800"/>
           </a:xfrm>
           <a:prstGeom prst="rect">
             <a:avLst/>
@@ -5323,8 +5836,8 @@
         </p:nvSpPr>
         <p:spPr>
           <a:xfrm>
-            <a:off x="548640" y="4892040"/>
-            <a:ext cx="11064240" cy="1783080"/>
+            <a:off x="548640" y="5029200"/>
+            <a:ext cx="11064240" cy="1645919"/>
           </a:xfrm>
           <a:prstGeom prst="rect">
             <a:avLst/>
@@ -5339,7 +5852,7 @@
           <a:p>
             <a:pPr>
               <a:spcAft>
-                <a:spcPts val="600"/>
+                <a:spcPts val="700"/>
               </a:spcAft>
               <a:defRPr sz="1350">
                 <a:solidFill>
@@ -5348,7 +5861,7 @@
               </a:defRPr>
             </a:pPr>
             <a:r>
-              <a:t>Prior work benchmarks per-complex bond errors against DFT or X-ray (Bursch 2017; Ln-xTB 2026). The contraction slope against experiment, and any lanthanide-geometry test of g-xTB, had not been done.</a:t>
+              <a:t>The network never sees raw coordinates — only this mesh and per-atom features. Pooling is centred on the metal, as a histogram over distance shells, so sub-0.1 Å changes in the coordination shell survive averaging.</a:t>
             </a:r>
           </a:p>
         </p:txBody>
@@ -5401,7 +5914,7 @@
               </a:defRPr>
             </a:pPr>
             <a:r>
-              <a:t>What moves the score, and what does not</a:t>
+              <a:t>Results</a:t>
             </a:r>
           </a:p>
         </p:txBody>
@@ -5416,7 +5929,7 @@
         </p:nvGraphicFramePr>
         <p:xfrm>
           <a:off x="640080" y="1371600"/>
-          <a:ext cx="10881360" cy="1645920"/>
+          <a:ext cx="10881360" cy="2267712"/>
         </p:xfrm>
         <a:graphic>
           <a:graphicData uri="http://schemas.openxmlformats.org/drawingml/2006/table">
@@ -5425,26 +5938,24 @@
                 <a:tableStyleId>{5C22544A-7EE6-4342-B048-85BDC9FD1C3A}</a:tableStyleId>
               </a:tblPr>
               <a:tblGrid>
-                <a:gridCol w="4206240"/>
-                <a:gridCol w="1371600"/>
-                <a:gridCol w="3931920"/>
-                <a:gridCol w="1371600"/>
+                <a:gridCol w="7863840"/>
+                <a:gridCol w="3017520"/>
               </a:tblGrid>
-              <a:tr h="329184">
+              <a:tr h="323958">
                 <a:tc>
                   <a:txBody>
                     <a:bodyPr/>
                     <a:lstStyle/>
                     <a:p>
                       <a:pPr>
-                        <a:defRPr sz="1300" b="1">
+                        <a:defRPr sz="1400" b="1">
                           <a:solidFill>
                             <a:srgbClr val="FFFFFF"/>
                           </a:solidFill>
                         </a:defRPr>
                       </a:pPr>
                       <a:r>
-                        <a:t>representation changes</a:t>
+                        <a:t>model (adjacent-pair R², held-out extractants)</a:t>
                       </a:r>
                     </a:p>
                   </a:txBody>
@@ -5456,14 +5967,31 @@
                     <a:lstStyle/>
                     <a:p>
                       <a:pPr>
-                        <a:defRPr sz="1300" b="1">
+                        <a:defRPr sz="1400" b="1">
                           <a:solidFill>
                             <a:srgbClr val="FFFFFF"/>
                           </a:solidFill>
                         </a:defRPr>
                       </a:pPr>
                       <a:r>
-                        <a:t>Δ adj. R²</a:t>
+                        <a:t>score</a:t>
+                      </a:r>
+                    </a:p>
+                  </a:txBody>
+                  <a:tcPr/>
+                </a:tc>
+              </a:tr>
+              <a:tr h="323958">
+                <a:tc>
+                  <a:txBody>
+                    <a:bodyPr/>
+                    <a:lstStyle/>
+                    <a:p>
+                      <a:pPr>
+                        <a:defRPr sz="1400"/>
+                      </a:pPr>
+                      <a:r>
+                        <a:t>gradient-boosted trees, descriptors only</a:t>
                       </a:r>
                     </a:p>
                   </a:txBody>
@@ -5475,14 +6003,27 @@
                     <a:lstStyle/>
                     <a:p>
                       <a:pPr>
-                        <a:defRPr sz="1300" b="1">
-                          <a:solidFill>
-                            <a:srgbClr val="FFFFFF"/>
-                          </a:solidFill>
-                        </a:defRPr>
+                        <a:defRPr sz="1400"/>
                       </a:pPr>
                       <a:r>
-                        <a:t>objective changes</a:t>
+                        <a:t>0.278</a:t>
+                      </a:r>
+                    </a:p>
+                  </a:txBody>
+                  <a:tcPr/>
+                </a:tc>
+              </a:tr>
+              <a:tr h="323958">
+                <a:tc>
+                  <a:txBody>
+                    <a:bodyPr/>
+                    <a:lstStyle/>
+                    <a:p>
+                      <a:pPr>
+                        <a:defRPr sz="1400"/>
+                      </a:pPr>
+                      <a:r>
+                        <a:t>fingerprint network</a:t>
                       </a:r>
                     </a:p>
                   </a:txBody>
@@ -5494,31 +6035,27 @@
                     <a:lstStyle/>
                     <a:p>
                       <a:pPr>
-                        <a:defRPr sz="1300" b="1">
-                          <a:solidFill>
-                            <a:srgbClr val="FFFFFF"/>
-                          </a:solidFill>
-                        </a:defRPr>
+                        <a:defRPr sz="1400"/>
                       </a:pPr>
                       <a:r>
-                        <a:t>Δ adj. R²</a:t>
+                        <a:t>0.221</a:t>
                       </a:r>
                     </a:p>
                   </a:txBody>
                   <a:tcPr/>
                 </a:tc>
               </a:tr>
-              <a:tr h="329184">
+              <a:tr h="323958">
                 <a:tc>
                   <a:txBody>
                     <a:bodyPr/>
                     <a:lstStyle/>
                     <a:p>
                       <a:pPr>
-                        <a:defRPr sz="1300"/>
+                        <a:defRPr sz="1400"/>
                       </a:pPr>
                       <a:r>
-                        <a:t>g-xTB geometries (correct contraction)</a:t>
+                        <a:t>3D structure model</a:t>
                       </a:r>
                     </a:p>
                   </a:txBody>
@@ -5530,10 +6067,27 @@
                     <a:lstStyle/>
                     <a:p>
                       <a:pPr>
-                        <a:defRPr sz="1300"/>
+                        <a:defRPr sz="1400"/>
                       </a:pPr>
                       <a:r>
-                        <a:t>+0.004 n.s.</a:t>
+                        <a:t>0.266</a:t>
+                      </a:r>
+                    </a:p>
+                  </a:txBody>
+                  <a:tcPr/>
+                </a:tc>
+              </a:tr>
+              <a:tr h="323958">
+                <a:tc>
+                  <a:txBody>
+                    <a:bodyPr/>
+                    <a:lstStyle/>
+                    <a:p>
+                      <a:pPr>
+                        <a:defRPr sz="1400"/>
+                      </a:pPr>
+                      <a:r>
+                        <a:t>combination of the two conventional models</a:t>
                       </a:r>
                     </a:p>
                   </a:txBody>
@@ -5545,10 +6099,27 @@
                     <a:lstStyle/>
                     <a:p>
                       <a:pPr>
-                        <a:defRPr sz="1300"/>
+                        <a:defRPr sz="1400"/>
                       </a:pPr>
                       <a:r>
-                        <a:t>boosting loss: RMSE → Quantile(0.6) + re-grid</a:t>
+                        <a:t>0.291</a:t>
+                      </a:r>
+                    </a:p>
+                  </a:txBody>
+                  <a:tcPr/>
+                </a:tc>
+              </a:tr>
+              <a:tr h="323958">
+                <a:tc>
+                  <a:txBody>
+                    <a:bodyPr/>
+                    <a:lstStyle/>
+                    <a:p>
+                      <a:pPr>
+                        <a:defRPr sz="1400"/>
+                      </a:pPr>
+                      <a:r>
+                        <a:t>combination including the 3D model</a:t>
                       </a:r>
                     </a:p>
                   </a:txBody>
@@ -5560,27 +6131,27 @@
                     <a:lstStyle/>
                     <a:p>
                       <a:pPr>
-                        <a:defRPr sz="1300"/>
+                        <a:defRPr sz="1400"/>
                       </a:pPr>
                       <a:r>
-                        <a:t>+0.136</a:t>
+                        <a:t>0.313</a:t>
                       </a:r>
                     </a:p>
                   </a:txBody>
                   <a:tcPr/>
                 </a:tc>
               </a:tr>
-              <a:tr h="329184">
+              <a:tr h="323964">
                 <a:tc>
                   <a:txBody>
                     <a:bodyPr/>
                     <a:lstStyle/>
                     <a:p>
                       <a:pPr>
-                        <a:defRPr sz="1300"/>
+                        <a:defRPr sz="1400"/>
                       </a:pPr>
                       <a:r>
-                        <a:t>structures in correspondence (455× less noise)</a:t>
+                        <a:t>control: trees + 84 3D-derived descriptor columns</a:t>
                       </a:r>
                     </a:p>
                   </a:txBody>
@@ -5592,159 +6163,11 @@
                     <a:lstStyle/>
                     <a:p>
                       <a:pPr>
-                        <a:defRPr sz="1300"/>
+                        <a:defRPr sz="1400"/>
                       </a:pPr>
                       <a:r>
-                        <a:t>−0.013</a:t>
+                        <a:t>−0.02  (collapses)</a:t>
                       </a:r>
-                    </a:p>
-                  </a:txBody>
-                  <a:tcPr/>
-                </a:tc>
-                <a:tc>
-                  <a:txBody>
-                    <a:bodyPr/>
-                    <a:lstStyle/>
-                    <a:p>
-                      <a:pPr>
-                        <a:defRPr sz="1300"/>
-                      </a:pPr>
-                      <a:r>
-                        <a:t>contrast weight 2 → 4, distance encoder (40 seeds)</a:t>
-                      </a:r>
-                    </a:p>
-                  </a:txBody>
-                  <a:tcPr/>
-                </a:tc>
-                <a:tc>
-                  <a:txBody>
-                    <a:bodyPr/>
-                    <a:lstStyle/>
-                    <a:p>
-                      <a:pPr>
-                        <a:defRPr sz="1300"/>
-                      </a:pPr>
-                      <a:r>
-                        <a:t>+0.014</a:t>
-                      </a:r>
-                    </a:p>
-                  </a:txBody>
-                  <a:tcPr/>
-                </a:tc>
-              </a:tr>
-              <a:tr h="329184">
-                <a:tc>
-                  <a:txBody>
-                    <a:bodyPr/>
-                    <a:lstStyle/>
-                    <a:p>
-                      <a:pPr>
-                        <a:defRPr sz="1300"/>
-                      </a:pPr>
-                      <a:r>
-                        <a:t>conditions modulating the embedding (FiLM)</a:t>
-                      </a:r>
-                    </a:p>
-                  </a:txBody>
-                  <a:tcPr/>
-                </a:tc>
-                <a:tc>
-                  <a:txBody>
-                    <a:bodyPr/>
-                    <a:lstStyle/>
-                    <a:p>
-                      <a:pPr>
-                        <a:defRPr sz="1300"/>
-                      </a:pPr>
-                      <a:r>
-                        <a:t>−0.108</a:t>
-                      </a:r>
-                    </a:p>
-                  </a:txBody>
-                  <a:tcPr/>
-                </a:tc>
-                <a:tc>
-                  <a:txBody>
-                    <a:bodyPr/>
-                    <a:lstStyle/>
-                    <a:p>
-                      <a:pPr>
-                        <a:defRPr sz="1300"/>
-                      </a:pPr>
-                      <a:r>
-                        <a:t>same change, simplicial encoder (24 seeds)</a:t>
-                      </a:r>
-                    </a:p>
-                  </a:txBody>
-                  <a:tcPr/>
-                </a:tc>
-                <a:tc>
-                  <a:txBody>
-                    <a:bodyPr/>
-                    <a:lstStyle/>
-                    <a:p>
-                      <a:pPr>
-                        <a:defRPr sz="1300"/>
-                      </a:pPr>
-                      <a:r>
-                        <a:t>+0.015</a:t>
-                      </a:r>
-                    </a:p>
-                  </a:txBody>
-                  <a:tcPr/>
-                </a:tc>
-              </a:tr>
-              <a:tr h="329184">
-                <a:tc>
-                  <a:txBody>
-                    <a:bodyPr/>
-                    <a:lstStyle/>
-                    <a:p>
-                      <a:pPr>
-                        <a:defRPr sz="1300"/>
-                      </a:pPr>
-                      <a:r>
-                        <a:t>direct pair head + reconciliation</a:t>
-                      </a:r>
-                    </a:p>
-                  </a:txBody>
-                  <a:tcPr/>
-                </a:tc>
-                <a:tc>
-                  <a:txBody>
-                    <a:bodyPr/>
-                    <a:lstStyle/>
-                    <a:p>
-                      <a:pPr>
-                        <a:defRPr sz="1300"/>
-                      </a:pPr>
-                      <a:r>
-                        <a:t>−1.16</a:t>
-                      </a:r>
-                    </a:p>
-                  </a:txBody>
-                  <a:tcPr/>
-                </a:tc>
-                <a:tc>
-                  <a:txBody>
-                    <a:bodyPr/>
-                    <a:lstStyle/>
-                    <a:p>
-                      <a:pPr>
-                        <a:defRPr sz="1300"/>
-                      </a:pPr>
-                    </a:p>
-                  </a:txBody>
-                  <a:tcPr/>
-                </a:tc>
-                <a:tc>
-                  <a:txBody>
-                    <a:bodyPr/>
-                    <a:lstStyle/>
-                    <a:p>
-                      <a:pPr>
-                        <a:defRPr sz="1300"/>
-                      </a:pPr>
                     </a:p>
                   </a:txBody>
                   <a:tcPr/>
@@ -5762,8 +6185,8 @@
         </p:nvSpPr>
         <p:spPr>
           <a:xfrm>
-            <a:off x="548640" y="3977639"/>
-            <a:ext cx="11064240" cy="2697480"/>
+            <a:off x="548640" y="4343400"/>
+            <a:ext cx="11064240" cy="2331720"/>
           </a:xfrm>
           <a:prstGeom prst="rect">
             <a:avLst/>
@@ -5778,16 +6201,31 @@
           <a:p>
             <a:pPr>
               <a:spcAft>
-                <a:spcPts val="600"/>
+                <a:spcPts val="700"/>
               </a:spcAft>
-              <a:defRPr sz="1400">
+              <a:defRPr sz="1350">
                 <a:solidFill>
                   <a:srgbClr val="101214"/>
                 </a:solidFill>
               </a:defRPr>
             </a:pPr>
             <a:r>
-              <a:t>Label ceiling ≈ +0.53 (repeated separations reproduce to 0.153 on a spread of 0.224); current best 0.31. Geometry explains about 1 % of pair variance under either Hamiltonian.</a:t>
+              <a:t>The 3D model adds +0.023 to the best conventional combination and carries the largest fitted weight (0.46). Its value is correcting errors the other two share — handing the same 3D information to the trees as descriptors does not reproduce it.</a:t>
+            </a:r>
+          </a:p>
+          <a:p>
+            <a:pPr>
+              <a:spcAft>
+                <a:spcPts val="700"/>
+              </a:spcAft>
+              <a:defRPr sz="1350">
+                <a:solidFill>
+                  <a:srgbClr val="52514E"/>
+                </a:solidFill>
+              </a:defRPr>
+            </a:pPr>
+            <a:r>
+              <a:t>Under stricter condition blocking the margin is +0.010; the 0.313 is exploratory until confirmed on a fresh held-out split.</a:t>
             </a:r>
           </a:p>
         </p:txBody>
@@ -5840,21 +6278,45 @@
               </a:defRPr>
             </a:pPr>
             <a:r>
-              <a:t>Summary and next steps</a:t>
-            </a:r>
-          </a:p>
-        </p:txBody>
-      </p:sp>
-      <p:sp>
-        <p:nvSpPr>
-          <p:cNvPr id="3" name="TextBox 2"/>
+              <a:t>Why the 3D signal is capped: the quantum chemistry underneath</a:t>
+            </a:r>
+          </a:p>
+        </p:txBody>
+      </p:sp>
+      <p:pic>
+        <p:nvPicPr>
+          <p:cNvPr id="3" name="Picture 2" descr="g4_params.png"/>
+          <p:cNvPicPr>
+            <a:picLocks noChangeAspect="1"/>
+          </p:cNvPicPr>
+          <p:nvPr/>
+        </p:nvPicPr>
+        <p:blipFill>
+          <a:blip r:embed="rId3"/>
+          <a:stretch>
+            <a:fillRect/>
+          </a:stretch>
+        </p:blipFill>
+        <p:spPr>
+          <a:xfrm>
+            <a:off x="975207" y="1280160"/>
+            <a:ext cx="10241280" cy="3037667"/>
+          </a:xfrm>
+          <a:prstGeom prst="rect">
+            <a:avLst/>
+          </a:prstGeom>
+        </p:spPr>
+      </p:pic>
+      <p:sp>
+        <p:nvSpPr>
+          <p:cNvPr id="4" name="TextBox 3"/>
           <p:cNvSpPr txBox="1"/>
           <p:nvPr/>
         </p:nvSpPr>
         <p:spPr>
           <a:xfrm>
-            <a:off x="548640" y="1234440"/>
-            <a:ext cx="11064240" cy="5440679"/>
+            <a:off x="548640" y="4480560"/>
+            <a:ext cx="11064240" cy="2194559"/>
           </a:xfrm>
           <a:prstGeom prst="rect">
             <a:avLst/>
@@ -5869,73 +6331,146 @@
           <a:p>
             <a:pPr>
               <a:spcAft>
-                <a:spcPts val="600"/>
+                <a:spcPts val="700"/>
               </a:spcAft>
-              <a:defRPr sz="1600">
+              <a:defRPr sz="1350">
                 <a:solidFill>
                   <a:srgbClr val="101214"/>
                 </a:solidFill>
               </a:defRPr>
             </a:pPr>
             <a:r>
-              <a:t>1.  The best system needs the 3D encoder: 0.313 with it, 0.291 without, largest stack weight. It is no longer the strongest single model; its value is complementarity, and tabular 3D descriptors cannot replace it.</a:t>
+              <a:t>To GFN2-xTB, the identity of the lanthanide is one number on a straight line. Its structures can therefore carry no f-shell physics — and that one number is already a descriptor column (the experimental ionic radius).</a:t>
             </a:r>
           </a:p>
           <a:p>
             <a:pPr>
               <a:spcAft>
-                <a:spcPts val="600"/>
+                <a:spcPts val="700"/>
               </a:spcAft>
-              <a:defRPr sz="1600">
+              <a:defRPr sz="1350">
                 <a:solidFill>
                   <a:srgbClr val="101214"/>
                 </a:solidFill>
               </a:defRPr>
             </a:pPr>
             <a:r>
-              <a:t>2.  The 3D ceiling belongs to GFN2-xTB, which under-predicts the lanthanide contraction 2.5×. g-xTB restores the chemistry (71/71 ligands, p = 5×10⁻⁵²) — and the score does not move. The benchmark is new and stands on its own.</a:t>
-            </a:r>
-          </a:p>
+              <a:t>Checked empirically: eight different 3D architectures give statistically identical predictions (cross-architecture correlation 0.986 — the same as re-running one architecture with a different random start).</a:t>
+            </a:r>
+          </a:p>
+        </p:txBody>
+      </p:sp>
+    </p:spTree>
+  </p:cSld>
+  <p:clrMapOvr>
+    <a:masterClrMapping/>
+  </p:clrMapOvr>
+</p:sld>
+</file>
+
+<file path=ppt/slides/slide9.xml><?xml version="1.0" encoding="utf-8"?>
+<p:sld xmlns:a="http://schemas.openxmlformats.org/drawingml/2006/main" xmlns:p="http://schemas.openxmlformats.org/presentationml/2006/main" xmlns:r="http://schemas.openxmlformats.org/officeDocument/2006/relationships">
+  <p:cSld>
+    <p:spTree>
+      <p:nvGrpSpPr>
+        <p:cNvPr id="1" name=""/>
+        <p:cNvGrpSpPr/>
+        <p:nvPr/>
+      </p:nvGrpSpPr>
+      <p:grpSpPr/>
+      <p:sp>
+        <p:nvSpPr>
+          <p:cNvPr id="2" name="TextBox 1"/>
+          <p:cNvSpPr txBox="1"/>
+          <p:nvPr/>
+        </p:nvSpPr>
+        <p:spPr>
+          <a:xfrm>
+            <a:off x="502920" y="292608"/>
+            <a:ext cx="11247120" cy="640080"/>
+          </a:xfrm>
+          <a:prstGeom prst="rect">
+            <a:avLst/>
+          </a:prstGeom>
+          <a:noFill/>
+        </p:spPr>
+        <p:txBody>
+          <a:bodyPr wrap="none">
+            <a:spAutoFit/>
+          </a:bodyPr>
+          <a:lstStyle/>
+          <a:p>
+            <a:pPr>
+              <a:defRPr sz="2600" b="1">
+                <a:solidFill>
+                  <a:srgbClr val="1A2E4A"/>
+                </a:solidFill>
+              </a:defRPr>
+            </a:pPr>
+            <a:r>
+              <a:t>Measuring what the structures get wrong: the contraction response</a:t>
+            </a:r>
+          </a:p>
+        </p:txBody>
+      </p:sp>
+      <p:pic>
+        <p:nvPicPr>
+          <p:cNvPr id="3" name="Picture 2" descr="g5_slope_demo.png"/>
+          <p:cNvPicPr>
+            <a:picLocks noChangeAspect="1"/>
+          </p:cNvPicPr>
+          <p:nvPr/>
+        </p:nvPicPr>
+        <p:blipFill>
+          <a:blip r:embed="rId3"/>
+          <a:stretch>
+            <a:fillRect/>
+          </a:stretch>
+        </p:blipFill>
+        <p:spPr>
+          <a:xfrm>
+            <a:off x="2346807" y="1280160"/>
+            <a:ext cx="7498079" cy="4143675"/>
+          </a:xfrm>
+          <a:prstGeom prst="rect">
+            <a:avLst/>
+          </a:prstGeom>
+        </p:spPr>
+      </p:pic>
+      <p:sp>
+        <p:nvSpPr>
+          <p:cNvPr id="4" name="TextBox 3"/>
+          <p:cNvSpPr txBox="1"/>
+          <p:nvPr/>
+        </p:nvSpPr>
+        <p:spPr>
+          <a:xfrm>
+            <a:off x="548640" y="5257800"/>
+            <a:ext cx="11064240" cy="1417319"/>
+          </a:xfrm>
+          <a:prstGeom prst="rect">
+            <a:avLst/>
+          </a:prstGeom>
+          <a:noFill/>
+        </p:spPr>
+        <p:txBody>
+          <a:bodyPr wrap="square">
+            <a:spAutoFit/>
+          </a:bodyPr>
+          <a:lstStyle/>
           <a:p>
             <a:pPr>
               <a:spcAft>
-                <a:spcPts val="600"/>
+                <a:spcPts val="700"/>
               </a:spcAft>
-              <a:defRPr sz="1600">
+              <a:defRPr sz="1350">
                 <a:solidFill>
                   <a:srgbClr val="101214"/>
                 </a:solidFill>
               </a:defRPr>
             </a:pPr>
             <a:r>
-              <a:t>3.  Every gain that survived testing came from aligning the loss with the scored contrast, not from richer representations.</a:t>
-            </a:r>
-          </a:p>
-          <a:p>
-            <a:pPr>
-              <a:spcAft>
-                <a:spcPts val="600"/>
-              </a:spcAft>
-              <a:defRPr sz="1600">
-                <a:solidFill>
-                  <a:srgbClr val="101214"/>
-                </a:solidFill>
-              </a:defRPr>
-            </a:pPr>
-          </a:p>
-          <a:p>
-            <a:pPr>
-              <a:spcAft>
-                <a:spcPts val="600"/>
-              </a:spcAft>
-              <a:defRPr sz="1600">
-                <a:solidFill>
-                  <a:srgbClr val="52514E"/>
-                </a:solidFill>
-              </a:defRPr>
-            </a:pPr>
-            <a:r>
-              <a:t>Next: a fresh held-out split for confirmation; the contraction benchmark as a paper (add Ln-xTB, Zhang 2026); direct pair modelling toward the +0.53 ceiling.</a:t>
+              <a:t>Swap the metal inside a fixed ligand cage, re-relax, and ask: does the metal–donor bond shrink as much as the ion actually shrinks? The slope of this line is the structure's response to the lanthanide contraction — the physics adjacent-pair selectivity runs on.</a:t>
             </a:r>
           </a:p>
         </p:txBody>

--- a/docs/vogiatzis_condensed_2026-08.pptx
+++ b/docs/vogiatzis_condensed_2026-08.pptx
@@ -17,6 +17,7 @@
     <p:sldId id="265" r:id="rId17"/>
     <p:sldId id="266" r:id="rId18"/>
     <p:sldId id="267" r:id="rId19"/>
+    <p:sldId id="268" r:id="rId20"/>
   </p:sldIdLst>
   <p:sldSz cx="12191695" cy="6858000" type="screen4x3"/>
   <p:notesSz cx="6858000" cy="9144000"/>
@@ -513,7 +514,7 @@
           <a:lstStyle/>
           <a:p>
             <a:r>
-              <a:t>First full walkthrough for Kostas. Order: problem, data, how models are tested, what the 3D model is, results, why the 3D signal is capped, the chemistry benchmark, what actually moves the score, next steps.</a:t>
+              <a:t>Order: problem, data, evaluation, the 3D model + how it predicts, results, why capped, the chemistry benchmark, what moves the score, summary.</a:t>
             </a:r>
           </a:p>
         </p:txBody>
@@ -583,7 +584,7 @@
           <a:lstStyle/>
           <a:p>
             <a:r>
-              <a:t>Population version of the previous slide: one dot per ligand. GFN2 mean 0.41 — the bond shrinks 2.5x too little — and scatter is mostly noise (only 23% of its ligand-to-ligand variation reproduces; 96% for g-xTB). g-xTB (Grimme group 2025, f-electrons explicit) improves 71 of 71 ligands, p = 5e-52; replicated in solvent. Why this is new: published benchmarks asked 'are the bond lengths of individual complexes close to DFT or X-ray?' (Bursch 2017: 80 complexes vs X-ray; Zhang 2026: vs DFT). Nobody asked 'walking La-&gt;Lu inside one ligand, does the bond shrink by the RIGHT AMOUNT vs experiment?' — a systematic trend error that per-complex statistics cannot see. And g-xTB's own preprint validates energies only, so its lanthanide geometries were untested until now. Obligation: read the Ln-xTB paper in full and run it through this same benchmark.</a:t>
+              <a:t>Define the observable: fixed ligand cage, swap the metal, re-relax, bond vs experimental radius; slope 1 = tracks reality. Inset: one adjacent step (Tb-Gd, 13 mA) -&gt; 5 mA response under GFN2 vs 15 mA under g-xTB — the physical signal an adjacent pair rides on, ~3x. This ligand is CN 8; fits use CN 8 radii.</a:t>
             </a:r>
           </a:p>
         </p:txBody>
@@ -653,7 +654,7 @@
           <a:lstStyle/>
           <a:p>
             <a:r>
-              <a:t>The decisive experiment: re-optimise all 956 complexes with g-xTB (structures now carry correct contraction physics), retrain everything matched — score does not move (+0.004). Cleaning conformer noise 455x: slightly worse. So structure quality is not the bottleneck. What did pay, every time: aligning the training loss with the scored quantity — the quantile loss on the trees (+0.136 cumulative) and up-weighting the within-block contrast term for the 3D model (+0.014-0.015, replicated on two different architectures with disjoint random seeds). Ceiling: repeated measurements of the same separation agree to 0.153 on a spread of 0.224 -&gt; labels support R2 ~ 0.53; we are at 0.31. The rest is likely in conditions and in predicting pairs directly — not in geometry (~1% of pair variance).</a:t>
+              <a:t>Population version: GFN2 mean 0.41, mostly noise (23% cross-ligand reproducibility vs 96%); g-xTB 1.08, improving 71/71 ligands, p=5e-52; replicated in solvent. Novelty (web-checked): prior work scored per-complex bond errors vs DFT/X-ray (Bursch 2017; Ln-xTB 2026); the response slope vs EXPERIMENT had not been measured, and g-xTB had no lanthanide geometry validation at all. Obligation: read Ln-xTB in full; run it through this benchmark.</a:t>
             </a:r>
           </a:p>
         </p:txBody>
@@ -723,7 +724,77 @@
           <a:lstStyle/>
           <a:p>
             <a:r>
-              <a:t>Suggested call order: S2 (2 min), S7 (5), S8-S10 (10), S11 (3), discussion. If he asks for the one-sentence version: the 3D model earns its place by correcting shared errors, the chemistry that limits it is now measured and publishable on its own, and the cheapest reliable gains were loss-function alignment.</a:t>
+              <a:t>Decisive: re-optimise all 956 complexes with g-xTB, retrain matched: +0.004 n.s. Cleaning conformer noise 455x: worse. Conditions into the representation: -0.108. What paid: quantile loss on trees (+0.136 cumulative) and the contrast weight 2-&gt;4 — final, pre-registered, both encoders, disjoint seeds, n=32 each: dist +0.0189 p=0.006, simplicial +0.0165 p=0.003, BOTH passing the scale-free anti-calibration check. Ceiling: separations reproduce to 0.153 on 0.224 spread -&gt; ~0.53; we are at 0.31; geometry ~1% of pair variance.</a:t>
+            </a:r>
+          </a:p>
+        </p:txBody>
+      </p:sp>
+      <p:sp>
+        <p:nvSpPr>
+          <p:cNvPr id="4" name="Slide Number Placeholder 3"/>
+          <p:cNvSpPr>
+            <a:spLocks noGrp="1"/>
+          </p:cNvSpPr>
+          <p:nvPr>
+            <p:ph type="sldNum" idx="5" sz="quarter"/>
+          </p:nvPr>
+        </p:nvSpPr>
+        <p:spPr/>
+      </p:sp>
+    </p:spTree>
+  </p:cSld>
+  <p:clrMapOvr>
+    <a:masterClrMapping/>
+  </p:clrMapOvr>
+</p:notes>
+</file>
+
+<file path=ppt/notesSlides/notesSlide13.xml><?xml version="1.0" encoding="utf-8"?>
+<p:notes xmlns:a="http://schemas.openxmlformats.org/drawingml/2006/main" xmlns:p="http://schemas.openxmlformats.org/presentationml/2006/main" xmlns:r="http://schemas.openxmlformats.org/officeDocument/2006/relationships">
+  <p:cSld>
+    <p:spTree>
+      <p:nvGrpSpPr>
+        <p:cNvPr id="1" name=""/>
+        <p:cNvGrpSpPr/>
+        <p:nvPr/>
+      </p:nvGrpSpPr>
+      <p:grpSpPr>
+        <a:xfrm>
+          <a:off x="0" y="0"/>
+          <a:ext cx="0" cy="0"/>
+          <a:chOff x="0" y="0"/>
+          <a:chExt cx="0" cy="0"/>
+        </a:xfrm>
+      </p:grpSpPr>
+      <p:sp>
+        <p:nvSpPr>
+          <p:cNvPr id="2" name="Slide Image Placeholder 1"/>
+          <p:cNvSpPr>
+            <a:spLocks noGrp="1"/>
+          </p:cNvSpPr>
+          <p:nvPr>
+            <p:ph type="sldImg" idx="2"/>
+          </p:nvPr>
+        </p:nvSpPr>
+        <p:spPr/>
+      </p:sp>
+      <p:sp>
+        <p:nvSpPr>
+          <p:cNvPr id="3" name="Notes Placeholder 2"/>
+          <p:cNvSpPr>
+            <a:spLocks noGrp="1"/>
+          </p:cNvSpPr>
+          <p:nvPr>
+            <p:ph type="body" idx="3" sz="quarter"/>
+          </p:nvPr>
+        </p:nvSpPr>
+        <p:spPr/>
+        <p:txBody>
+          <a:bodyPr/>
+          <a:lstStyle/>
+          <a:p>
+            <a:r>
+              <a:t>If time is short: S8 and S11 are the talk. Call order suggestion: S2 (2 min), S8 (5), S9-S11 (10), S12 (3), discussion.</a:t>
             </a:r>
           </a:p>
         </p:txBody>
@@ -793,7 +864,7 @@
           <a:lstStyle/>
           <a:p>
             <a:r>
-              <a:t>Industrial framing: solvent extraction is the route; adjacent pairs (Nd/Pr for magnets, Dy/Tb) are the expensive ones. The schematic defines the exact predicted quantity — walk it slowly. R2 = 0 means predicting the average separation for every pair; even the sign of the separation is nontrivial (best models reach 67% sign accuracy).</a:t>
+              <a:t>Adjacent pairs (Nd/Pr, Dy/Tb) are the expensive separations. The schematic defines the predicted quantity. R2=0 already means predicting the average separation; best sign accuracy ~0.67.</a:t>
             </a:r>
           </a:p>
         </p:txBody>
@@ -863,7 +934,7 @@
           <a:lstStyle/>
           <a:p>
             <a:r>
-              <a:t>SAFE is DOI-linked and condition-resolved; replicates across labs are real replicates (later this gives the noise floor). Pm does not occur in nature -&gt; 14 lanthanides. Architector builds a 3D guess of the actual extraction complex; GFN2-xTB relaxes it; convergence is verified with an independent force check. 956 unique complexes back 4,746 measurements.</a:t>
+              <a:t>SAFE: DOI-linked, condition-resolved; replicates across labs are real replicates (later gives the noise floor). 956 complexes; convergence force-checked independently.</a:t>
             </a:r>
           </a:p>
         </p:txBody>
@@ -933,7 +1004,7 @@
           <a:lstStyle/>
           <a:p>
             <a:r>
-              <a:t>Why grouped: extractants repeat across rows; a random row split would let the model memorise the ligand — leakage. Why repeats: one grouping is one lottery draw. Why ensembles/seeds: single networks are noisy; per-seed sd of a paired difference is 0.0285, so confirmatory comparisons use 24-32 seeds. Out-of-fold = the union of held-out predictions.</a:t>
+              <a:t>Grouped CV = no ligand leakage; replicate averaging inside blocks; ensembles scored out-of-fold. Step 2 walks a real TODGA block: the +1.6 offset on an unseen extractant cancels in the difference — why the metric differences within blocks. Per-seed sd of a paired delta 0.0285 -&gt; confirmatory runs use 24-32 seeds.</a:t>
             </a:r>
           </a:p>
         </p:txBody>
@@ -1003,7 +1074,7 @@
           <a:lstStyle/>
           <a:p>
             <a:r>
-              <a:t>Two conventional ('2D': they see the molecular graph and conditions, no 3D structure): gradient-boosted trees on the 746 columns; a neural network on fingerprints. The third is ours and is introduced properly on the next slide. All three predict log D per row; separations come from differencing predictions within a block. A combination fits per-extractant weights over the three predictions, on the separation vectors themselves (nested, held-out).</a:t>
+              <a:t>Two conventional (no 3D input): boosted trees on 746 columns; fingerprint network. Third reads the optimised 3D structure (next two slides). Combination = per-extractant NNLS on the separation vectors, nested.</a:t>
             </a:r>
           </a:p>
         </p:txBody>
@@ -1073,7 +1144,7 @@
           <a:lstStyle/>
           <a:p>
             <a:r>
-              <a:t>Vietoris-Rips = the mesh built by rule 2+3; message passing = each atom repeatedly updates its state from its neighbours along edges and triangles; after 3 rounds each atom has 'seen' its 3-hop environment. Pooling is metal-centred: a soft histogram of distances to the metal — plain averaging over ~100 atoms would wash out the 0.01-A shell changes that carry the signal. Without that pooling the model cannot even tell which lanthanide it holds.</a:t>
+              <a:t>Panels are a REAL Dy complex from the shipped asset: its true 96 edges and 147 triangles at the 3.5 A training radius. Message passing: one donor's incoming messages highlighted. Readout is metal-centred by distance shell — without it the encoder cannot even identify the lanthanide (R2 0.016).</a:t>
             </a:r>
           </a:p>
         </p:txBody>
@@ -1143,7 +1214,7 @@
           <a:lstStyle/>
           <a:p>
             <a:r>
-              <a:t>Loss functions mattered more than architectures: the tree model at RMSE scores 0.14; switching to a quantile loss and re-tuning gives 0.278. The 3D model's contrast-weighted loss gives 0.266. Control row: giving the tree model 84 3D-derived tabular descriptors (donor distances, angles, charges) makes it WORSE (-0.02) — so the 3D model's contribution is not replicable by cheap descriptors; in the combination the fitted weight on the 3D model is the largest (0.46). Caveats aloud: under stricter condition blocking the 3D margin halves to +0.010; the 0.313 is exploratory — all clean held-out partitions have been consumed; a fresh split is the next step before any publication-grade claim.</a:t>
+              <a:t>One real Gd/TODGA row, end to end: the actual 864-number embedding (9 named readout blocks), the row's 746 tabular values, concatenate 1610, the real head, the model's real held-out prediction (+0.95 vs measured +2.42 — absolute log D of an unseen extractant is hard; differences are what is scored). Loss card: per-row Huber + within-block pair term (weight 2, adjacent x3) — term 2 is why it learns separations; the next slides change exactly that weight.</a:t>
             </a:r>
           </a:p>
         </p:txBody>
@@ -1213,7 +1284,7 @@
           <a:lstStyle/>
           <a:p>
             <a:r>
-              <a:t>Walk the figure: these are the method's own published parameters, plotted against atomic number. Every lanthanide between Ce and Lu was never fitted — it is the straight line. f-electrons are frozen into the core. So to this method, 'which lanthanide' is a single number that slides along a line. Consequence for ML: any structure it produces can encode the metal only through that one number — and we already give the models that number as a column (the experimental ionic radius). Empirical check: we trained eight different 3D architectures; their predictions are statistically identical (correlation 0.986 across architectures = the seed-to-seed correlation of one architecture).</a:t>
+              <a:t>Loss functions matter more than architectures. Rows: trees 0.278 (RMSE-&gt;quantile + re-tune; +0.016 confirmed held-out); fingerprint 0.221; best single 3D arm 0.266 (distance encoder with the new contrast weight; the simplicial ensemble is 0.239-&gt;0.243 with it); 2D stack 0.291; +3D 0.313, marginal +0.023, largest weight 0.46. Control row: same trees + 84 3D-derived descriptor columns COLLAPSES to -0.02 -&gt; the encoder is not replicable by cheap descriptors; over that stack its marginal is +0.041. Caveats aloud: strict key +0.010; 0.313 exploratory (no clean held-out partition remains -&gt; fresh split next).</a:t>
             </a:r>
           </a:p>
         </p:txBody>
@@ -1283,7 +1354,7 @@
           <a:lstStyle/>
           <a:p>
             <a:r>
-              <a:t>Define the observable slowly — it is ours. Take ONE ligand cage, keep it fixed, put each of the 14 lanthanides in, re-relax, measure the mean metal-donor distance, plot against the EXPERIMENTAL radius of that ion. Slope 1.00 = the bond tracks reality. This isolates exactly the physics adjacent-pair selectivity depends on. The figure is one real ligand of the 71 measured; both methods run through the identical protocol, same binary.</a:t>
+              <a:t>The method's own parameters vs Z: every lanthanide between the two circled anchors IS the straight line — panel 4 proves it for all 16 parameter families (deviations = the file's rounding). Grey band at Gd = where a real f-shell puts a break; GFN2 cannot, by construction. Empirical consequence already measured: eight 3D encoders statistically identical (r 0.986 = seed noise). The one number the geometry can carry is already a descriptor column.</a:t>
             </a:r>
           </a:p>
         </p:txBody>
@@ -4405,6 +4476,83 @@
               </a:defRPr>
             </a:pPr>
             <a:r>
+              <a:t>Measuring what the structures get wrong: the contraction response</a:t>
+            </a:r>
+          </a:p>
+        </p:txBody>
+      </p:sp>
+      <p:pic>
+        <p:nvPicPr>
+          <p:cNvPr id="3" name="Picture 2" descr="g5_slope_demo.png"/>
+          <p:cNvPicPr>
+            <a:picLocks noChangeAspect="1"/>
+          </p:cNvPicPr>
+          <p:nvPr/>
+        </p:nvPicPr>
+        <p:blipFill>
+          <a:blip r:embed="rId3"/>
+          <a:stretch>
+            <a:fillRect/>
+          </a:stretch>
+        </p:blipFill>
+        <p:spPr>
+          <a:xfrm>
+            <a:off x="1798167" y="1280160"/>
+            <a:ext cx="8595360" cy="4721335"/>
+          </a:xfrm>
+          <a:prstGeom prst="rect">
+            <a:avLst/>
+          </a:prstGeom>
+        </p:spPr>
+      </p:pic>
+    </p:spTree>
+  </p:cSld>
+  <p:clrMapOvr>
+    <a:masterClrMapping/>
+  </p:clrMapOvr>
+</p:sld>
+</file>
+
+<file path=ppt/slides/slide11.xml><?xml version="1.0" encoding="utf-8"?>
+<p:sld xmlns:a="http://schemas.openxmlformats.org/drawingml/2006/main" xmlns:p="http://schemas.openxmlformats.org/presentationml/2006/main" xmlns:r="http://schemas.openxmlformats.org/officeDocument/2006/relationships">
+  <p:cSld>
+    <p:spTree>
+      <p:nvGrpSpPr>
+        <p:cNvPr id="1" name=""/>
+        <p:cNvGrpSpPr/>
+        <p:nvPr/>
+      </p:nvGrpSpPr>
+      <p:grpSpPr/>
+      <p:sp>
+        <p:nvSpPr>
+          <p:cNvPr id="2" name="TextBox 1"/>
+          <p:cNvSpPr txBox="1"/>
+          <p:nvPr/>
+        </p:nvSpPr>
+        <p:spPr>
+          <a:xfrm>
+            <a:off x="502920" y="292608"/>
+            <a:ext cx="11247120" cy="640080"/>
+          </a:xfrm>
+          <a:prstGeom prst="rect">
+            <a:avLst/>
+          </a:prstGeom>
+          <a:noFill/>
+        </p:spPr>
+        <p:txBody>
+          <a:bodyPr wrap="none">
+            <a:spAutoFit/>
+          </a:bodyPr>
+          <a:lstStyle/>
+          <a:p>
+            <a:pPr>
+              <a:defRPr sz="2600" b="1">
+                <a:solidFill>
+                  <a:srgbClr val="1A2E4A"/>
+                </a:solidFill>
+              </a:defRPr>
+            </a:pPr>
+            <a:r>
               <a:t>Across 71 ligands: GFN2-xTB under-responds 2.5×; g-xTB gets it right</a:t>
             </a:r>
           </a:p>
@@ -4467,7 +4615,7 @@
               </a:defRPr>
             </a:pPr>
             <a:r>
-              <a:t>New in this measurement: published benchmarks score individual complexes against DFT or X-ray structures. The response to the contraction — the trend across the series, against experimental radii — had not been measured for any tight-binding method, and g-xTB's lanthanide geometries had never been tested at all (its paper validates energies).</a:t>
+              <a:t>New in this measurement: published benchmarks score individual complexes against DFT or X-ray. The response to the contraction — the trend across the series, against experimental radii — had not been measured for any tight-binding method, and g-xTB's lanthanide geometries had never been tested (its paper validates energies).</a:t>
             </a:r>
           </a:p>
         </p:txBody>
@@ -4480,7 +4628,7 @@
 </p:sld>
 </file>
 
-<file path=ppt/slides/slide11.xml><?xml version="1.0" encoding="utf-8"?>
+<file path=ppt/slides/slide12.xml><?xml version="1.0" encoding="utf-8"?>
 <p:sld xmlns:a="http://schemas.openxmlformats.org/drawingml/2006/main" xmlns:p="http://schemas.openxmlformats.org/presentationml/2006/main" xmlns:r="http://schemas.openxmlformats.org/officeDocument/2006/relationships">
   <p:cSld>
     <p:spTree>
@@ -4544,10 +4692,10 @@
                 <a:tableStyleId>{5C22544A-7EE6-4342-B048-85BDC9FD1C3A}</a:tableStyleId>
               </a:tblPr>
               <a:tblGrid>
-                <a:gridCol w="4297680"/>
+                <a:gridCol w="4206240"/>
                 <a:gridCol w="1371600"/>
                 <a:gridCol w="3840480"/>
-                <a:gridCol w="1371600"/>
+                <a:gridCol w="1463040"/>
               </a:tblGrid>
               <a:tr h="333756">
                 <a:tc>
@@ -4729,7 +4877,7 @@
                         <a:defRPr sz="1300"/>
                       </a:pPr>
                       <a:r>
-                        <a:t>3D model: up-weight the contrast term</a:t>
+                        <a:t>contrast weight 2→4, distance encoder (32 seeds)</a:t>
                       </a:r>
                     </a:p>
                   </a:txBody>
@@ -4744,7 +4892,7 @@
                         <a:defRPr sz="1300"/>
                       </a:pPr>
                       <a:r>
-                        <a:t>+0.014</a:t>
+                        <a:t>+0.019  p=0.006</a:t>
                       </a:r>
                     </a:p>
                   </a:txBody>
@@ -4791,7 +4939,7 @@
                         <a:defRPr sz="1300"/>
                       </a:pPr>
                       <a:r>
-                        <a:t>same change on a second architecture</a:t>
+                        <a:t>same change, published simplicial model (32 seeds)</a:t>
                       </a:r>
                     </a:p>
                   </a:txBody>
@@ -4806,7 +4954,7 @@
                         <a:defRPr sz="1300"/>
                       </a:pPr>
                       <a:r>
-                        <a:t>+0.015</a:t>
+                        <a:t>+0.017  p=0.003</a:t>
                       </a:r>
                     </a:p>
                   </a:txBody>
@@ -4850,7 +4998,7 @@
               </a:defRPr>
             </a:pPr>
             <a:r>
-              <a:t>Every structure-side improvement left the score unchanged or worse; every surviving gain came from aligning the training loss with the scored separation.</a:t>
+              <a:t>Every structure-side improvement left the score unchanged or worse; every surviving gain came from aligning the training loss with the scored separation — the same change, on both encoders, from disjoint seed sets, passing the anti-calibration check (pre-registered).</a:t>
             </a:r>
           </a:p>
           <a:p>
@@ -4878,7 +5026,7 @@
 </p:sld>
 </file>
 
-<file path=ppt/slides/slide12.xml><?xml version="1.0" encoding="utf-8"?>
+<file path=ppt/slides/slide13.xml><?xml version="1.0" encoding="utf-8"?>
 <p:sld xmlns:a="http://schemas.openxmlformats.org/drawingml/2006/main" xmlns:p="http://schemas.openxmlformats.org/presentationml/2006/main" xmlns:r="http://schemas.openxmlformats.org/officeDocument/2006/relationships">
   <p:cSld>
     <p:spTree>
@@ -4956,7 +5104,7 @@
               </a:defRPr>
             </a:pPr>
             <a:r>
-              <a:t>1.  The best system includes the 3D structure model: 0.313 vs 0.291 without it, largest fitted weight. Its contribution is correcting errors the conventional models share — and it is not reproducible by handing the trees 3D-derived descriptors.</a:t>
+              <a:t>1.  The best system includes the 3D structure model: 0.313 vs 0.291 without it, largest fitted weight — and its contribution is not reproducible by handing the trees 3D-derived descriptors (those collapse the model).</a:t>
             </a:r>
           </a:p>
           <a:p>
@@ -4971,7 +5119,7 @@
               </a:defRPr>
             </a:pPr>
             <a:r>
-              <a:t>2.  The ceiling on 3D is the quantum chemistry: GFN2-xTB carries no f-shell physics and under-responds to the lanthanide contraction 2.5×. Fixing the chemistry (g-xTB: right to within 8 %, 71/71 ligands, p = 5×10⁻⁵²) does not move the prediction — a new, standalone benchmark result.</a:t>
+              <a:t>2.  The ceiling on 3D is the quantum chemistry: GFN2-xTB carries no f-shell physics and under-responds to the lanthanide contraction 2.5×. Fixing the chemistry (g-xTB: within 8 %, 71/71 ligands, p = 5×10⁻⁵²) does not move the prediction — a new, standalone benchmark result.</a:t>
             </a:r>
           </a:p>
           <a:p>
@@ -4986,7 +5134,7 @@
               </a:defRPr>
             </a:pPr>
             <a:r>
-              <a:t>3.  What moved predictions, every time, was aligning the training loss with the scored separation — not richer structures.</a:t>
+              <a:t>3.  What moved predictions was aligning the training loss with the scored separation — the one fully pre-registered positive: +0.019 / +0.017 on the two encoders, 32 disjoint seeds each, both passing the anti-calibration check.</a:t>
             </a:r>
           </a:p>
           <a:p>
@@ -5013,7 +5161,7 @@
               </a:defRPr>
             </a:pPr>
             <a:r>
-              <a:t>Next: a fresh held-out split to confirm 0.313; the contraction benchmark as a paper (adding Ln-xTB, Zhang 2026); predicting separations directly, toward the 0.53 that the labels support.</a:t>
+              <a:t>Next: a fresh held-out split to confirm 0.313; the contraction benchmark as a paper (add Ln-xTB, Zhang 2026); predicting separations directly, toward the 0.53 the labels support.</a:t>
             </a:r>
           </a:p>
         </p:txBody>
@@ -5141,7 +5289,7 @@
         <p:spPr>
           <a:xfrm>
             <a:off x="1158087" y="2880360"/>
-            <a:ext cx="9875520" cy="3103734"/>
+            <a:ext cx="9875520" cy="3545157"/>
           </a:xfrm>
           <a:prstGeom prst="rect">
             <a:avLst/>
@@ -5595,8 +5743,8 @@
         </p:blipFill>
         <p:spPr>
           <a:xfrm>
-            <a:off x="929487" y="1280160"/>
-            <a:ext cx="10332720" cy="3731260"/>
+            <a:off x="1249527" y="1234440"/>
+            <a:ext cx="9692640" cy="5755005"/>
           </a:xfrm>
           <a:prstGeom prst="rect">
             <a:avLst/>
@@ -5719,7 +5867,7 @@
               </a:defRPr>
             </a:pPr>
             <a:r>
-              <a:t>Model 3 — a network that reads the optimised 3D structure of the extraction complex itself (next slide).</a:t>
+              <a:t>Model 3 — a network that reads the optimised 3D structure of the extraction complex itself (next slides).</a:t>
             </a:r>
           </a:p>
           <a:p>
@@ -5746,7 +5894,7 @@
               </a:defRPr>
             </a:pPr>
             <a:r>
-              <a:t>Each predicts log D per measurement; separations are differences of predictions inside a block. The final system is a weighted combination of the three, with weights fitted per held-out extractant on the separations directly.</a:t>
+              <a:t>Each predicts log D per measurement; separations are differences of predictions inside a block. The final system is a weighted combination of the three, weights fitted per held-out extractant on the separations directly.</a:t>
             </a:r>
           </a:p>
         </p:txBody>
@@ -5821,51 +5969,13 @@
         <p:spPr>
           <a:xfrm>
             <a:off x="518007" y="1325880"/>
-            <a:ext cx="11155680" cy="3098800"/>
+            <a:ext cx="11155680" cy="5316378"/>
           </a:xfrm>
           <a:prstGeom prst="rect">
             <a:avLst/>
           </a:prstGeom>
         </p:spPr>
       </p:pic>
-      <p:sp>
-        <p:nvSpPr>
-          <p:cNvPr id="4" name="TextBox 3"/>
-          <p:cNvSpPr txBox="1"/>
-          <p:nvPr/>
-        </p:nvSpPr>
-        <p:spPr>
-          <a:xfrm>
-            <a:off x="548640" y="5029200"/>
-            <a:ext cx="11064240" cy="1645919"/>
-          </a:xfrm>
-          <a:prstGeom prst="rect">
-            <a:avLst/>
-          </a:prstGeom>
-          <a:noFill/>
-        </p:spPr>
-        <p:txBody>
-          <a:bodyPr wrap="square">
-            <a:spAutoFit/>
-          </a:bodyPr>
-          <a:lstStyle/>
-          <a:p>
-            <a:pPr>
-              <a:spcAft>
-                <a:spcPts val="700"/>
-              </a:spcAft>
-              <a:defRPr sz="1350">
-                <a:solidFill>
-                  <a:srgbClr val="101214"/>
-                </a:solidFill>
-              </a:defRPr>
-            </a:pPr>
-            <a:r>
-              <a:t>The network never sees raw coordinates — only this mesh and per-atom features. Pooling is centred on the metal, as a histogram over distance shells, so sub-0.1 Å changes in the coordination shell survive averaging.</a:t>
-            </a:r>
-          </a:p>
-        </p:txBody>
-      </p:sp>
     </p:spTree>
   </p:cSld>
   <p:clrMapOvr>
@@ -5875,6 +5985,83 @@
 </file>
 
 <file path=ppt/slides/slide7.xml><?xml version="1.0" encoding="utf-8"?>
+<p:sld xmlns:a="http://schemas.openxmlformats.org/drawingml/2006/main" xmlns:p="http://schemas.openxmlformats.org/presentationml/2006/main" xmlns:r="http://schemas.openxmlformats.org/officeDocument/2006/relationships">
+  <p:cSld>
+    <p:spTree>
+      <p:nvGrpSpPr>
+        <p:cNvPr id="1" name=""/>
+        <p:cNvGrpSpPr/>
+        <p:nvPr/>
+      </p:nvGrpSpPr>
+      <p:grpSpPr/>
+      <p:sp>
+        <p:nvSpPr>
+          <p:cNvPr id="2" name="TextBox 1"/>
+          <p:cNvSpPr txBox="1"/>
+          <p:nvPr/>
+        </p:nvSpPr>
+        <p:spPr>
+          <a:xfrm>
+            <a:off x="502920" y="292608"/>
+            <a:ext cx="11247120" cy="640080"/>
+          </a:xfrm>
+          <a:prstGeom prst="rect">
+            <a:avLst/>
+          </a:prstGeom>
+          <a:noFill/>
+        </p:spPr>
+        <p:txBody>
+          <a:bodyPr wrap="none">
+            <a:spAutoFit/>
+          </a:bodyPr>
+          <a:lstStyle/>
+          <a:p>
+            <a:pPr>
+              <a:defRPr sz="2600" b="1">
+                <a:solidFill>
+                  <a:srgbClr val="1A2E4A"/>
+                </a:solidFill>
+              </a:defRPr>
+            </a:pPr>
+            <a:r>
+              <a:t>From structure to a number</a:t>
+            </a:r>
+          </a:p>
+        </p:txBody>
+      </p:sp>
+      <p:pic>
+        <p:nvPicPr>
+          <p:cNvPr id="3" name="Picture 2" descr="g6_vector.png"/>
+          <p:cNvPicPr>
+            <a:picLocks noChangeAspect="1"/>
+          </p:cNvPicPr>
+          <p:nvPr/>
+        </p:nvPicPr>
+        <p:blipFill>
+          <a:blip r:embed="rId3"/>
+          <a:stretch>
+            <a:fillRect/>
+          </a:stretch>
+        </p:blipFill>
+        <p:spPr>
+          <a:xfrm>
+            <a:off x="655167" y="1234440"/>
+            <a:ext cx="10881360" cy="5610701"/>
+          </a:xfrm>
+          <a:prstGeom prst="rect">
+            <a:avLst/>
+          </a:prstGeom>
+        </p:spPr>
+      </p:pic>
+    </p:spTree>
+  </p:cSld>
+  <p:clrMapOvr>
+    <a:masterClrMapping/>
+  </p:clrMapOvr>
+</p:sld>
+</file>
+
+<file path=ppt/slides/slide8.xml><?xml version="1.0" encoding="utf-8"?>
 <p:sld xmlns:a="http://schemas.openxmlformats.org/drawingml/2006/main" xmlns:p="http://schemas.openxmlformats.org/presentationml/2006/main" xmlns:r="http://schemas.openxmlformats.org/officeDocument/2006/relationships">
   <p:cSld>
     <p:spTree>
@@ -6055,7 +6242,7 @@
                         <a:defRPr sz="1400"/>
                       </a:pPr>
                       <a:r>
-                        <a:t>3D structure model</a:t>
+                        <a:t>best 3D structure model</a:t>
                       </a:r>
                     </a:p>
                   </a:txBody>
@@ -6210,7 +6397,7 @@
               </a:defRPr>
             </a:pPr>
             <a:r>
-              <a:t>The 3D model adds +0.023 to the best conventional combination and carries the largest fitted weight (0.46). Its value is correcting errors the other two share — handing the same 3D information to the trees as descriptors does not reproduce it.</a:t>
+              <a:t>The 3D model adds +0.023 to the best conventional combination and carries the largest fitted weight (0.46). Handing the same 3D information to the trees as descriptors does not reproduce it — it subtracts.</a:t>
             </a:r>
           </a:p>
           <a:p>
@@ -6226,136 +6413,6 @@
             </a:pPr>
             <a:r>
               <a:t>Under stricter condition blocking the margin is +0.010; the 0.313 is exploratory until confirmed on a fresh held-out split.</a:t>
-            </a:r>
-          </a:p>
-        </p:txBody>
-      </p:sp>
-    </p:spTree>
-  </p:cSld>
-  <p:clrMapOvr>
-    <a:masterClrMapping/>
-  </p:clrMapOvr>
-</p:sld>
-</file>
-
-<file path=ppt/slides/slide8.xml><?xml version="1.0" encoding="utf-8"?>
-<p:sld xmlns:a="http://schemas.openxmlformats.org/drawingml/2006/main" xmlns:p="http://schemas.openxmlformats.org/presentationml/2006/main" xmlns:r="http://schemas.openxmlformats.org/officeDocument/2006/relationships">
-  <p:cSld>
-    <p:spTree>
-      <p:nvGrpSpPr>
-        <p:cNvPr id="1" name=""/>
-        <p:cNvGrpSpPr/>
-        <p:nvPr/>
-      </p:nvGrpSpPr>
-      <p:grpSpPr/>
-      <p:sp>
-        <p:nvSpPr>
-          <p:cNvPr id="2" name="TextBox 1"/>
-          <p:cNvSpPr txBox="1"/>
-          <p:nvPr/>
-        </p:nvSpPr>
-        <p:spPr>
-          <a:xfrm>
-            <a:off x="502920" y="292608"/>
-            <a:ext cx="11247120" cy="640080"/>
-          </a:xfrm>
-          <a:prstGeom prst="rect">
-            <a:avLst/>
-          </a:prstGeom>
-          <a:noFill/>
-        </p:spPr>
-        <p:txBody>
-          <a:bodyPr wrap="none">
-            <a:spAutoFit/>
-          </a:bodyPr>
-          <a:lstStyle/>
-          <a:p>
-            <a:pPr>
-              <a:defRPr sz="2600" b="1">
-                <a:solidFill>
-                  <a:srgbClr val="1A2E4A"/>
-                </a:solidFill>
-              </a:defRPr>
-            </a:pPr>
-            <a:r>
-              <a:t>Why the 3D signal is capped: the quantum chemistry underneath</a:t>
-            </a:r>
-          </a:p>
-        </p:txBody>
-      </p:sp>
-      <p:pic>
-        <p:nvPicPr>
-          <p:cNvPr id="3" name="Picture 2" descr="g4_params.png"/>
-          <p:cNvPicPr>
-            <a:picLocks noChangeAspect="1"/>
-          </p:cNvPicPr>
-          <p:nvPr/>
-        </p:nvPicPr>
-        <p:blipFill>
-          <a:blip r:embed="rId3"/>
-          <a:stretch>
-            <a:fillRect/>
-          </a:stretch>
-        </p:blipFill>
-        <p:spPr>
-          <a:xfrm>
-            <a:off x="975207" y="1280160"/>
-            <a:ext cx="10241280" cy="3037667"/>
-          </a:xfrm>
-          <a:prstGeom prst="rect">
-            <a:avLst/>
-          </a:prstGeom>
-        </p:spPr>
-      </p:pic>
-      <p:sp>
-        <p:nvSpPr>
-          <p:cNvPr id="4" name="TextBox 3"/>
-          <p:cNvSpPr txBox="1"/>
-          <p:nvPr/>
-        </p:nvSpPr>
-        <p:spPr>
-          <a:xfrm>
-            <a:off x="548640" y="4480560"/>
-            <a:ext cx="11064240" cy="2194559"/>
-          </a:xfrm>
-          <a:prstGeom prst="rect">
-            <a:avLst/>
-          </a:prstGeom>
-          <a:noFill/>
-        </p:spPr>
-        <p:txBody>
-          <a:bodyPr wrap="square">
-            <a:spAutoFit/>
-          </a:bodyPr>
-          <a:lstStyle/>
-          <a:p>
-            <a:pPr>
-              <a:spcAft>
-                <a:spcPts val="700"/>
-              </a:spcAft>
-              <a:defRPr sz="1350">
-                <a:solidFill>
-                  <a:srgbClr val="101214"/>
-                </a:solidFill>
-              </a:defRPr>
-            </a:pPr>
-            <a:r>
-              <a:t>To GFN2-xTB, the identity of the lanthanide is one number on a straight line. Its structures can therefore carry no f-shell physics — and that one number is already a descriptor column (the experimental ionic radius).</a:t>
-            </a:r>
-          </a:p>
-          <a:p>
-            <a:pPr>
-              <a:spcAft>
-                <a:spcPts val="700"/>
-              </a:spcAft>
-              <a:defRPr sz="1350">
-                <a:solidFill>
-                  <a:srgbClr val="101214"/>
-                </a:solidFill>
-              </a:defRPr>
-            </a:pPr>
-            <a:r>
-              <a:t>Checked empirically: eight different 3D architectures give statistically identical predictions (cross-architecture correlation 0.986 — the same as re-running one architecture with a different random start).</a:t>
             </a:r>
           </a:p>
         </p:txBody>
@@ -6408,14 +6465,14 @@
               </a:defRPr>
             </a:pPr>
             <a:r>
-              <a:t>Measuring what the structures get wrong: the contraction response</a:t>
+              <a:t>Why the 3D signal is capped: the quantum chemistry underneath</a:t>
             </a:r>
           </a:p>
         </p:txBody>
       </p:sp>
       <p:pic>
         <p:nvPicPr>
-          <p:cNvPr id="3" name="Picture 2" descr="g5_slope_demo.png"/>
+          <p:cNvPr id="3" name="Picture 2" descr="g4_params.png"/>
           <p:cNvPicPr>
             <a:picLocks noChangeAspect="1"/>
           </p:cNvPicPr>
@@ -6429,8 +6486,8 @@
         </p:blipFill>
         <p:spPr>
           <a:xfrm>
-            <a:off x="2346807" y="1280160"/>
-            <a:ext cx="7498079" cy="4143675"/>
+            <a:off x="792327" y="1280160"/>
+            <a:ext cx="10607040" cy="4806315"/>
           </a:xfrm>
           <a:prstGeom prst="rect">
             <a:avLst/>
@@ -6445,8 +6502,8 @@
         </p:nvSpPr>
         <p:spPr>
           <a:xfrm>
-            <a:off x="548640" y="5257800"/>
-            <a:ext cx="11064240" cy="1417319"/>
+            <a:off x="548640" y="4892040"/>
+            <a:ext cx="11064240" cy="1783080"/>
           </a:xfrm>
           <a:prstGeom prst="rect">
             <a:avLst/>
@@ -6470,7 +6527,7 @@
               </a:defRPr>
             </a:pPr>
             <a:r>
-              <a:t>Swap the metal inside a fixed ligand cage, re-relax, and ask: does the metal–donor bond shrink as much as the ion actually shrinks? The slope of this line is the structure's response to the lanthanide contraction — the physics adjacent-pair selectivity runs on.</a:t>
+              <a:t>To GFN2-xTB, lanthanide identity is one number on a straight line — and that number is already a descriptor column (the Shannon ionic radius). Eight different 3D architectures give statistically identical predictions (correlation 0.986 = seed noise).</a:t>
             </a:r>
           </a:p>
         </p:txBody>

--- a/docs/vogiatzis_condensed_2026-08.pptx
+++ b/docs/vogiatzis_condensed_2026-08.pptx
@@ -4939,7 +4939,7 @@
                         <a:defRPr sz="1300"/>
                       </a:pPr>
                       <a:r>
-                        <a:t>same change, published simplicial model (32 seeds)</a:t>
+                        <a:t>same change, July-baseline simplicial model (32 seeds)</a:t>
                       </a:r>
                     </a:p>
                   </a:txBody>
